--- a/media/figstudio/fig02_route_matrix/fig02_route_variable_matrix_en_editable.pptx
+++ b/media/figstudio/fig02_route_matrix/fig02_route_variable_matrix_en_editable.pptx
@@ -3535,7 +3535,7 @@
           <a:solidFill>
             <a:srgbClr val="E6F2F3"/>
           </a:solidFill>
-          <a:ln w="9524">
+          <a:ln w="12699">
             <a:solidFill>
               <a:srgbClr val="1F7F8C"/>
             </a:solidFill>
@@ -3639,7 +3639,7 @@
           <a:solidFill>
             <a:srgbClr val="EEF2F7"/>
           </a:solidFill>
-          <a:ln w="9524">
+          <a:ln w="12699">
             <a:solidFill>
               <a:srgbClr val="5B7592"/>
             </a:solidFill>
@@ -3743,7 +3743,7 @@
           <a:solidFill>
             <a:srgbClr val="E6F2F3"/>
           </a:solidFill>
-          <a:ln w="9524">
+          <a:ln w="12699">
             <a:solidFill>
               <a:srgbClr val="1F7F8C"/>
             </a:solidFill>
@@ -3847,7 +3847,7 @@
           <a:solidFill>
             <a:srgbClr val="F5F6F7"/>
           </a:solidFill>
-          <a:ln w="8731">
+          <a:ln w="12699">
             <a:solidFill>
               <a:srgbClr val="9AA3AB"/>
             </a:solidFill>
@@ -3909,7 +3909,7 @@
               <a:spcAft>
                 <a:spcPts val="0"/>
               </a:spcAft>
-              <a:defRPr sz="1124" b="0" i="0" lang="zh-CN" dirty="0">
+              <a:defRPr sz="1124" b="1" i="0" lang="zh-CN" dirty="0">
                 <a:solidFill>
                   <a:srgbClr val="5B6570"/>
                 </a:solidFill>
@@ -3919,7 +3919,7 @@
               </a:defRPr>
             </a:pPr>
             <a:r>
-              <a:rPr sz="1124" b="0" i="0" lang="zh-CN" dirty="0">
+              <a:rPr sz="1124" b="1" i="0" lang="zh-CN" dirty="0">
                 <a:solidFill>
                   <a:srgbClr val="5B6570"/>
                 </a:solidFill>
@@ -3951,7 +3951,7 @@
           <a:solidFill>
             <a:srgbClr val="FFFFFF"/>
           </a:solidFill>
-          <a:ln w="11112">
+          <a:ln w="15081">
             <a:solidFill>
               <a:srgbClr val="1F7F8C"/>
             </a:solidFill>
@@ -4096,9 +4096,9 @@
           <a:prstGeom prst="line">
             <a:avLst/>
           </a:prstGeom>
-          <a:ln w="9207">
+          <a:ln w="18216">
             <a:solidFill>
-              <a:srgbClr val="1F2937"/>
+              <a:srgbClr val="111A24"/>
             </a:solidFill>
           </a:ln>
           <a:effectLst/>
@@ -4132,9 +4132,9 @@
           <a:prstGeom prst="line">
             <a:avLst/>
           </a:prstGeom>
-          <a:ln w="9207">
+          <a:ln w="18216">
             <a:solidFill>
-              <a:srgbClr val="1F2937"/>
+              <a:srgbClr val="111A24"/>
             </a:solidFill>
           </a:ln>
           <a:effectLst/>
@@ -4168,9 +4168,9 @@
           <a:prstGeom prst="line">
             <a:avLst/>
           </a:prstGeom>
-          <a:ln w="9207">
+          <a:ln w="18216">
             <a:solidFill>
-              <a:srgbClr val="1F2937"/>
+              <a:srgbClr val="111A24"/>
             </a:solidFill>
           </a:ln>
           <a:effectLst/>
@@ -4204,9 +4204,9 @@
           <a:prstGeom prst="line">
             <a:avLst/>
           </a:prstGeom>
-          <a:ln w="9207">
+          <a:ln w="18216">
             <a:solidFill>
-              <a:srgbClr val="1F2937"/>
+              <a:srgbClr val="111A24"/>
             </a:solidFill>
           </a:ln>
           <a:effectLst/>
@@ -4240,9 +4240,9 @@
           <a:prstGeom prst="line">
             <a:avLst/>
           </a:prstGeom>
-          <a:ln w="9207">
+          <a:ln w="18216">
             <a:solidFill>
-              <a:srgbClr val="1F2937"/>
+              <a:srgbClr val="111A24"/>
             </a:solidFill>
           </a:ln>
           <a:effectLst/>
@@ -4276,9 +4276,9 @@
           <a:prstGeom prst="line">
             <a:avLst/>
           </a:prstGeom>
-          <a:ln w="9207">
+          <a:ln w="18216">
             <a:solidFill>
-              <a:srgbClr val="1F2937"/>
+              <a:srgbClr val="111A24"/>
             </a:solidFill>
           </a:ln>
           <a:effectLst/>
@@ -4313,9 +4313,9 @@
             <a:avLst/>
           </a:prstGeom>
           <a:noFill/>
-          <a:ln w="9207">
+          <a:ln w="18216">
             <a:solidFill>
-              <a:srgbClr val="1F2937"/>
+              <a:srgbClr val="111A24"/>
             </a:solidFill>
           </a:ln>
           <a:effectLst/>
@@ -4357,9 +4357,9 @@
             <a:avLst/>
           </a:prstGeom>
           <a:noFill/>
-          <a:ln w="9207">
+          <a:ln w="18216">
             <a:solidFill>
-              <a:srgbClr val="1F2937"/>
+              <a:srgbClr val="111A24"/>
             </a:solidFill>
           </a:ln>
           <a:effectLst/>
@@ -4403,11 +4403,11 @@
             </a:avLst>
           </a:prstGeom>
           <a:solidFill>
-            <a:srgbClr val="F7F9FB"/>
+            <a:srgbClr val="F4F7FA"/>
           </a:solidFill>
-          <a:ln w="9524">
+          <a:ln w="12699">
             <a:solidFill>
-              <a:srgbClr val="CBD3DA"/>
+              <a:srgbClr val="AEBBC7"/>
             </a:solidFill>
           </a:ln>
           <a:effectLst/>
@@ -4467,9 +4467,9 @@
               <a:spcAft>
                 <a:spcPts val="0"/>
               </a:spcAft>
-              <a:defRPr sz="1187" b="0" i="0" lang="zh-CN" dirty="0">
+              <a:defRPr sz="1187" b="1" i="0" lang="zh-CN" dirty="0">
                 <a:solidFill>
-                  <a:srgbClr val="3F4854"/>
+                  <a:srgbClr val="27303A"/>
                 </a:solidFill>
                 <a:latin typeface="DejaVu Sans"/>
                 <a:ea typeface="DejaVu Sans"/>
@@ -4477,9 +4477,9 @@
               </a:defRPr>
             </a:pPr>
             <a:r>
-              <a:rPr sz="1187" b="0" i="0" lang="zh-CN" dirty="0">
+              <a:rPr sz="1187" b="1" i="0" lang="zh-CN" dirty="0">
                 <a:solidFill>
-                  <a:srgbClr val="3F4854"/>
+                  <a:srgbClr val="27303A"/>
                 </a:solidFill>
                 <a:latin typeface="DejaVu Sans"/>
                 <a:ea typeface="DejaVu Sans"/>
@@ -4507,11 +4507,11 @@
             </a:avLst>
           </a:prstGeom>
           <a:solidFill>
-            <a:srgbClr val="F7F9FB"/>
+            <a:srgbClr val="F4F7FA"/>
           </a:solidFill>
-          <a:ln w="9524">
+          <a:ln w="12699">
             <a:solidFill>
-              <a:srgbClr val="CBD3DA"/>
+              <a:srgbClr val="AEBBC7"/>
             </a:solidFill>
           </a:ln>
           <a:effectLst/>
@@ -4571,9 +4571,9 @@
               <a:spcAft>
                 <a:spcPts val="0"/>
               </a:spcAft>
-              <a:defRPr sz="1187" b="0" i="0" lang="zh-CN" dirty="0">
+              <a:defRPr sz="1187" b="1" i="0" lang="zh-CN" dirty="0">
                 <a:solidFill>
-                  <a:srgbClr val="3F4854"/>
+                  <a:srgbClr val="27303A"/>
                 </a:solidFill>
                 <a:latin typeface="DejaVu Sans"/>
                 <a:ea typeface="DejaVu Sans"/>
@@ -4581,9 +4581,9 @@
               </a:defRPr>
             </a:pPr>
             <a:r>
-              <a:rPr sz="1187" b="0" i="0" lang="zh-CN" dirty="0">
+              <a:rPr sz="1187" b="1" i="0" lang="zh-CN" dirty="0">
                 <a:solidFill>
-                  <a:srgbClr val="3F4854"/>
+                  <a:srgbClr val="27303A"/>
                 </a:solidFill>
                 <a:latin typeface="DejaVu Sans"/>
                 <a:ea typeface="DejaVu Sans"/>
@@ -4614,10 +4614,10 @@
             <a:pathLst>
               <a:path w="5940" h="12000">
                 <a:moveTo>
-                  <a:pt x="3770" y="0"/>
+                  <a:pt x="4070" y="0"/>
                 </a:moveTo>
                 <a:lnTo>
-                  <a:pt x="3770" y="5400"/>
+                  <a:pt x="4070" y="5400"/>
                 </a:lnTo>
                 <a:lnTo>
                   <a:pt x="5940" y="5400"/>
@@ -4629,17 +4629,17 @@
                   <a:pt x="0" y="5400"/>
                 </a:lnTo>
                 <a:lnTo>
-                  <a:pt x="2170" y="5400"/>
+                  <a:pt x="1870" y="5400"/>
                 </a:lnTo>
                 <a:lnTo>
-                  <a:pt x="2170" y="0"/>
+                  <a:pt x="1870" y="0"/>
                 </a:lnTo>
                 <a:close/>
               </a:path>
             </a:pathLst>
           </a:custGeom>
           <a:solidFill>
-            <a:srgbClr val="4B5563"/>
+            <a:srgbClr val="3C4753"/>
           </a:solidFill>
           <a:ln>
             <a:noFill/>
@@ -4685,11 +4685,11 @@
             </a:avLst>
           </a:prstGeom>
           <a:solidFill>
-            <a:srgbClr val="F7F9FB"/>
+            <a:srgbClr val="F4F7FA"/>
           </a:solidFill>
-          <a:ln w="9524">
+          <a:ln w="12699">
             <a:solidFill>
-              <a:srgbClr val="CBD3DA"/>
+              <a:srgbClr val="AEBBC7"/>
             </a:solidFill>
           </a:ln>
           <a:effectLst/>
@@ -4749,9 +4749,9 @@
               <a:spcAft>
                 <a:spcPts val="0"/>
               </a:spcAft>
-              <a:defRPr sz="1187" b="0" i="0" lang="zh-CN" dirty="0">
+              <a:defRPr sz="1187" b="1" i="0" lang="zh-CN" dirty="0">
                 <a:solidFill>
-                  <a:srgbClr val="3F4854"/>
+                  <a:srgbClr val="27303A"/>
                 </a:solidFill>
                 <a:latin typeface="DejaVu Sans"/>
                 <a:ea typeface="DejaVu Sans"/>
@@ -4759,9 +4759,9 @@
               </a:defRPr>
             </a:pPr>
             <a:r>
-              <a:rPr sz="1187" b="0" i="0" lang="zh-CN" dirty="0">
+              <a:rPr sz="1187" b="1" i="0" lang="zh-CN" dirty="0">
                 <a:solidFill>
-                  <a:srgbClr val="3F4854"/>
+                  <a:srgbClr val="27303A"/>
                 </a:solidFill>
                 <a:latin typeface="DejaVu Sans"/>
                 <a:ea typeface="DejaVu Sans"/>
@@ -4792,10 +4792,10 @@
             <a:pathLst>
               <a:path w="5940" h="12000">
                 <a:moveTo>
-                  <a:pt x="3770" y="0"/>
+                  <a:pt x="4070" y="0"/>
                 </a:moveTo>
                 <a:lnTo>
-                  <a:pt x="3770" y="5400"/>
+                  <a:pt x="4070" y="5400"/>
                 </a:lnTo>
                 <a:lnTo>
                   <a:pt x="5940" y="5400"/>
@@ -4807,17 +4807,17 @@
                   <a:pt x="0" y="5400"/>
                 </a:lnTo>
                 <a:lnTo>
-                  <a:pt x="2170" y="5400"/>
+                  <a:pt x="1870" y="5400"/>
                 </a:lnTo>
                 <a:lnTo>
-                  <a:pt x="2170" y="0"/>
+                  <a:pt x="1870" y="0"/>
                 </a:lnTo>
                 <a:close/>
               </a:path>
             </a:pathLst>
           </a:custGeom>
           <a:solidFill>
-            <a:srgbClr val="4B5563"/>
+            <a:srgbClr val="3C4753"/>
           </a:solidFill>
           <a:ln>
             <a:noFill/>
@@ -4865,7 +4865,7 @@
           <a:solidFill>
             <a:srgbClr val="FFFFFF"/>
           </a:solidFill>
-          <a:ln w="11112">
+          <a:ln w="15081">
             <a:solidFill>
               <a:srgbClr val="1F7F8C"/>
             </a:solidFill>
@@ -5010,9 +5010,9 @@
           <a:prstGeom prst="line">
             <a:avLst/>
           </a:prstGeom>
-          <a:ln w="9207">
+          <a:ln w="18216">
             <a:solidFill>
-              <a:srgbClr val="1F2937"/>
+              <a:srgbClr val="111A24"/>
             </a:solidFill>
           </a:ln>
           <a:effectLst/>
@@ -5046,9 +5046,9 @@
           <a:prstGeom prst="line">
             <a:avLst/>
           </a:prstGeom>
-          <a:ln w="9207">
+          <a:ln w="18216">
             <a:solidFill>
-              <a:srgbClr val="1F2937"/>
+              <a:srgbClr val="111A24"/>
             </a:solidFill>
           </a:ln>
           <a:effectLst/>
@@ -5082,9 +5082,9 @@
           <a:prstGeom prst="line">
             <a:avLst/>
           </a:prstGeom>
-          <a:ln w="9207">
+          <a:ln w="18216">
             <a:solidFill>
-              <a:srgbClr val="1F2937"/>
+              <a:srgbClr val="111A24"/>
             </a:solidFill>
           </a:ln>
           <a:effectLst/>
@@ -5118,9 +5118,9 @@
           <a:prstGeom prst="line">
             <a:avLst/>
           </a:prstGeom>
-          <a:ln w="9207">
+          <a:ln w="18216">
             <a:solidFill>
-              <a:srgbClr val="1F2937"/>
+              <a:srgbClr val="111A24"/>
             </a:solidFill>
           </a:ln>
           <a:effectLst/>
@@ -5154,9 +5154,9 @@
           <a:prstGeom prst="line">
             <a:avLst/>
           </a:prstGeom>
-          <a:ln w="9207">
+          <a:ln w="18216">
             <a:solidFill>
-              <a:srgbClr val="1F2937"/>
+              <a:srgbClr val="111A24"/>
             </a:solidFill>
           </a:ln>
           <a:effectLst/>
@@ -5190,9 +5190,9 @@
           <a:prstGeom prst="line">
             <a:avLst/>
           </a:prstGeom>
-          <a:ln w="9207">
+          <a:ln w="18216">
             <a:solidFill>
-              <a:srgbClr val="1F2937"/>
+              <a:srgbClr val="111A24"/>
             </a:solidFill>
           </a:ln>
           <a:effectLst/>
@@ -5226,9 +5226,9 @@
           <a:prstGeom prst="line">
             <a:avLst/>
           </a:prstGeom>
-          <a:ln w="9207">
+          <a:ln w="18216">
             <a:solidFill>
-              <a:srgbClr val="1F2937"/>
+              <a:srgbClr val="111A24"/>
             </a:solidFill>
           </a:ln>
           <a:effectLst/>
@@ -5262,9 +5262,9 @@
           <a:prstGeom prst="line">
             <a:avLst/>
           </a:prstGeom>
-          <a:ln w="9207">
+          <a:ln w="18216">
             <a:solidFill>
-              <a:srgbClr val="1F2937"/>
+              <a:srgbClr val="111A24"/>
             </a:solidFill>
           </a:ln>
           <a:effectLst/>
@@ -5301,11 +5301,11 @@
             </a:avLst>
           </a:prstGeom>
           <a:solidFill>
-            <a:srgbClr val="F7F9FB"/>
+            <a:srgbClr val="F4F7FA"/>
           </a:solidFill>
-          <a:ln w="9524">
+          <a:ln w="12699">
             <a:solidFill>
-              <a:srgbClr val="CBD3DA"/>
+              <a:srgbClr val="AEBBC7"/>
             </a:solidFill>
           </a:ln>
           <a:effectLst/>
@@ -5365,9 +5365,9 @@
               <a:spcAft>
                 <a:spcPts val="0"/>
               </a:spcAft>
-              <a:defRPr sz="1187" b="0" i="0" lang="zh-CN" dirty="0">
+              <a:defRPr sz="1187" b="1" i="0" lang="zh-CN" dirty="0">
                 <a:solidFill>
-                  <a:srgbClr val="3F4854"/>
+                  <a:srgbClr val="27303A"/>
                 </a:solidFill>
                 <a:latin typeface="DejaVu Sans"/>
                 <a:ea typeface="DejaVu Sans"/>
@@ -5375,9 +5375,9 @@
               </a:defRPr>
             </a:pPr>
             <a:r>
-              <a:rPr sz="1187" b="0" i="0" lang="zh-CN" dirty="0">
+              <a:rPr sz="1187" b="1" i="0" lang="zh-CN" dirty="0">
                 <a:solidFill>
-                  <a:srgbClr val="3F4854"/>
+                  <a:srgbClr val="27303A"/>
                 </a:solidFill>
                 <a:latin typeface="DejaVu Sans"/>
                 <a:ea typeface="DejaVu Sans"/>
@@ -5405,11 +5405,11 @@
             </a:avLst>
           </a:prstGeom>
           <a:solidFill>
-            <a:srgbClr val="F7F9FB"/>
+            <a:srgbClr val="F4F7FA"/>
           </a:solidFill>
-          <a:ln w="9524">
+          <a:ln w="12699">
             <a:solidFill>
-              <a:srgbClr val="CBD3DA"/>
+              <a:srgbClr val="AEBBC7"/>
             </a:solidFill>
           </a:ln>
           <a:effectLst/>
@@ -5469,9 +5469,9 @@
               <a:spcAft>
                 <a:spcPts val="0"/>
               </a:spcAft>
-              <a:defRPr sz="1187" b="0" i="0" lang="zh-CN" dirty="0">
+              <a:defRPr sz="1187" b="1" i="0" lang="zh-CN" dirty="0">
                 <a:solidFill>
-                  <a:srgbClr val="3F4854"/>
+                  <a:srgbClr val="27303A"/>
                 </a:solidFill>
                 <a:latin typeface="DejaVu Sans"/>
                 <a:ea typeface="DejaVu Sans"/>
@@ -5479,9 +5479,9 @@
               </a:defRPr>
             </a:pPr>
             <a:r>
-              <a:rPr sz="1187" b="0" i="0" lang="zh-CN" dirty="0">
+              <a:rPr sz="1187" b="1" i="0" lang="zh-CN" dirty="0">
                 <a:solidFill>
-                  <a:srgbClr val="3F4854"/>
+                  <a:srgbClr val="27303A"/>
                 </a:solidFill>
                 <a:latin typeface="DejaVu Sans"/>
                 <a:ea typeface="DejaVu Sans"/>
@@ -5512,10 +5512,10 @@
             <a:pathLst>
               <a:path w="5940" h="12000">
                 <a:moveTo>
-                  <a:pt x="3770" y="0"/>
+                  <a:pt x="4070" y="0"/>
                 </a:moveTo>
                 <a:lnTo>
-                  <a:pt x="3770" y="5400"/>
+                  <a:pt x="4070" y="5400"/>
                 </a:lnTo>
                 <a:lnTo>
                   <a:pt x="5940" y="5400"/>
@@ -5527,17 +5527,17 @@
                   <a:pt x="0" y="5400"/>
                 </a:lnTo>
                 <a:lnTo>
-                  <a:pt x="2170" y="5400"/>
+                  <a:pt x="1870" y="5400"/>
                 </a:lnTo>
                 <a:lnTo>
-                  <a:pt x="2170" y="0"/>
+                  <a:pt x="1870" y="0"/>
                 </a:lnTo>
                 <a:close/>
               </a:path>
             </a:pathLst>
           </a:custGeom>
           <a:solidFill>
-            <a:srgbClr val="4B5563"/>
+            <a:srgbClr val="3C4753"/>
           </a:solidFill>
           <a:ln>
             <a:noFill/>
@@ -5583,11 +5583,11 @@
             </a:avLst>
           </a:prstGeom>
           <a:solidFill>
-            <a:srgbClr val="F7F9FB"/>
+            <a:srgbClr val="F4F7FA"/>
           </a:solidFill>
-          <a:ln w="9524">
+          <a:ln w="12699">
             <a:solidFill>
-              <a:srgbClr val="CBD3DA"/>
+              <a:srgbClr val="AEBBC7"/>
             </a:solidFill>
           </a:ln>
           <a:effectLst/>
@@ -5647,9 +5647,9 @@
               <a:spcAft>
                 <a:spcPts val="0"/>
               </a:spcAft>
-              <a:defRPr sz="1187" b="0" i="0" lang="zh-CN" dirty="0">
+              <a:defRPr sz="1187" b="1" i="0" lang="zh-CN" dirty="0">
                 <a:solidFill>
-                  <a:srgbClr val="3F4854"/>
+                  <a:srgbClr val="27303A"/>
                 </a:solidFill>
                 <a:latin typeface="DejaVu Sans"/>
                 <a:ea typeface="DejaVu Sans"/>
@@ -5657,9 +5657,9 @@
               </a:defRPr>
             </a:pPr>
             <a:r>
-              <a:rPr sz="1187" b="0" i="0" lang="zh-CN" dirty="0">
+              <a:rPr sz="1187" b="1" i="0" lang="zh-CN" dirty="0">
                 <a:solidFill>
-                  <a:srgbClr val="3F4854"/>
+                  <a:srgbClr val="27303A"/>
                 </a:solidFill>
                 <a:latin typeface="DejaVu Sans"/>
                 <a:ea typeface="DejaVu Sans"/>
@@ -5690,10 +5690,10 @@
             <a:pathLst>
               <a:path w="5940" h="12000">
                 <a:moveTo>
-                  <a:pt x="3770" y="0"/>
+                  <a:pt x="4070" y="0"/>
                 </a:moveTo>
                 <a:lnTo>
-                  <a:pt x="3770" y="5400"/>
+                  <a:pt x="4070" y="5400"/>
                 </a:lnTo>
                 <a:lnTo>
                   <a:pt x="5940" y="5400"/>
@@ -5705,17 +5705,17 @@
                   <a:pt x="0" y="5400"/>
                 </a:lnTo>
                 <a:lnTo>
-                  <a:pt x="2170" y="5400"/>
+                  <a:pt x="1870" y="5400"/>
                 </a:lnTo>
                 <a:lnTo>
-                  <a:pt x="2170" y="0"/>
+                  <a:pt x="1870" y="0"/>
                 </a:lnTo>
                 <a:close/>
               </a:path>
             </a:pathLst>
           </a:custGeom>
           <a:solidFill>
-            <a:srgbClr val="4B5563"/>
+            <a:srgbClr val="3C4753"/>
           </a:solidFill>
           <a:ln>
             <a:noFill/>
@@ -5763,7 +5763,7 @@
           <a:solidFill>
             <a:srgbClr val="FFFFFF"/>
           </a:solidFill>
-          <a:ln w="11112">
+          <a:ln w="15081">
             <a:solidFill>
               <a:srgbClr val="1F7F8C"/>
             </a:solidFill>
@@ -5909,9 +5909,9 @@
             <a:avLst/>
           </a:prstGeom>
           <a:noFill/>
-          <a:ln w="9207">
+          <a:ln w="18216">
             <a:solidFill>
-              <a:srgbClr val="1F2937"/>
+              <a:srgbClr val="111A24"/>
             </a:solidFill>
           </a:ln>
           <a:effectLst/>
@@ -5952,9 +5952,9 @@
           <a:prstGeom prst="line">
             <a:avLst/>
           </a:prstGeom>
-          <a:ln w="9207">
+          <a:ln w="18216">
             <a:solidFill>
-              <a:srgbClr val="1F2937"/>
+              <a:srgbClr val="111A24"/>
             </a:solidFill>
           </a:ln>
           <a:effectLst/>
@@ -5988,9 +5988,9 @@
           <a:prstGeom prst="line">
             <a:avLst/>
           </a:prstGeom>
-          <a:ln w="9207">
+          <a:ln w="18216">
             <a:solidFill>
-              <a:srgbClr val="1F2937"/>
+              <a:srgbClr val="111A24"/>
             </a:solidFill>
           </a:ln>
           <a:effectLst/>
@@ -6025,9 +6025,9 @@
             <a:avLst/>
           </a:prstGeom>
           <a:noFill/>
-          <a:ln w="9207">
+          <a:ln w="18216">
             <a:solidFill>
-              <a:srgbClr val="1F2937"/>
+              <a:srgbClr val="111A24"/>
             </a:solidFill>
           </a:ln>
           <a:effectLst/>
@@ -6071,11 +6071,11 @@
             </a:avLst>
           </a:prstGeom>
           <a:solidFill>
-            <a:srgbClr val="F7F9FB"/>
+            <a:srgbClr val="F4F7FA"/>
           </a:solidFill>
-          <a:ln w="9524">
+          <a:ln w="12699">
             <a:solidFill>
-              <a:srgbClr val="CBD3DA"/>
+              <a:srgbClr val="AEBBC7"/>
             </a:solidFill>
           </a:ln>
           <a:effectLst/>
@@ -6135,9 +6135,9 @@
               <a:spcAft>
                 <a:spcPts val="0"/>
               </a:spcAft>
-              <a:defRPr sz="1187" b="0" i="0" lang="zh-CN" dirty="0">
+              <a:defRPr sz="1187" b="1" i="0" lang="zh-CN" dirty="0">
                 <a:solidFill>
-                  <a:srgbClr val="3F4854"/>
+                  <a:srgbClr val="27303A"/>
                 </a:solidFill>
                 <a:latin typeface="DejaVu Sans"/>
                 <a:ea typeface="DejaVu Sans"/>
@@ -6145,9 +6145,9 @@
               </a:defRPr>
             </a:pPr>
             <a:r>
-              <a:rPr sz="1187" b="0" i="0" lang="zh-CN" dirty="0">
+              <a:rPr sz="1187" b="1" i="0" lang="zh-CN" dirty="0">
                 <a:solidFill>
-                  <a:srgbClr val="3F4854"/>
+                  <a:srgbClr val="27303A"/>
                 </a:solidFill>
                 <a:latin typeface="DejaVu Sans"/>
                 <a:ea typeface="DejaVu Sans"/>
@@ -6175,11 +6175,11 @@
             </a:avLst>
           </a:prstGeom>
           <a:solidFill>
-            <a:srgbClr val="F7F9FB"/>
+            <a:srgbClr val="F4F7FA"/>
           </a:solidFill>
-          <a:ln w="9524">
+          <a:ln w="12699">
             <a:solidFill>
-              <a:srgbClr val="CBD3DA"/>
+              <a:srgbClr val="AEBBC7"/>
             </a:solidFill>
           </a:ln>
           <a:effectLst/>
@@ -6239,9 +6239,9 @@
               <a:spcAft>
                 <a:spcPts val="0"/>
               </a:spcAft>
-              <a:defRPr sz="1187" b="0" i="0" lang="zh-CN" dirty="0">
+              <a:defRPr sz="1187" b="1" i="0" lang="zh-CN" dirty="0">
                 <a:solidFill>
-                  <a:srgbClr val="3F4854"/>
+                  <a:srgbClr val="27303A"/>
                 </a:solidFill>
                 <a:latin typeface="DejaVu Sans"/>
                 <a:ea typeface="DejaVu Sans"/>
@@ -6249,9 +6249,9 @@
               </a:defRPr>
             </a:pPr>
             <a:r>
-              <a:rPr sz="1187" b="0" i="0" lang="zh-CN" dirty="0">
+              <a:rPr sz="1187" b="1" i="0" lang="zh-CN" dirty="0">
                 <a:solidFill>
-                  <a:srgbClr val="3F4854"/>
+                  <a:srgbClr val="27303A"/>
                 </a:solidFill>
                 <a:latin typeface="DejaVu Sans"/>
                 <a:ea typeface="DejaVu Sans"/>
@@ -6282,10 +6282,10 @@
             <a:pathLst>
               <a:path w="5940" h="12000">
                 <a:moveTo>
-                  <a:pt x="3770" y="0"/>
+                  <a:pt x="4070" y="0"/>
                 </a:moveTo>
                 <a:lnTo>
-                  <a:pt x="3770" y="5400"/>
+                  <a:pt x="4070" y="5400"/>
                 </a:lnTo>
                 <a:lnTo>
                   <a:pt x="5940" y="5400"/>
@@ -6297,17 +6297,17 @@
                   <a:pt x="0" y="5400"/>
                 </a:lnTo>
                 <a:lnTo>
-                  <a:pt x="2170" y="5400"/>
+                  <a:pt x="1870" y="5400"/>
                 </a:lnTo>
                 <a:lnTo>
-                  <a:pt x="2170" y="0"/>
+                  <a:pt x="1870" y="0"/>
                 </a:lnTo>
                 <a:close/>
               </a:path>
             </a:pathLst>
           </a:custGeom>
           <a:solidFill>
-            <a:srgbClr val="4B5563"/>
+            <a:srgbClr val="3C4753"/>
           </a:solidFill>
           <a:ln>
             <a:noFill/>
@@ -6353,11 +6353,11 @@
             </a:avLst>
           </a:prstGeom>
           <a:solidFill>
-            <a:srgbClr val="F7F9FB"/>
+            <a:srgbClr val="F4F7FA"/>
           </a:solidFill>
-          <a:ln w="9524">
+          <a:ln w="12699">
             <a:solidFill>
-              <a:srgbClr val="CBD3DA"/>
+              <a:srgbClr val="AEBBC7"/>
             </a:solidFill>
           </a:ln>
           <a:effectLst/>
@@ -6417,9 +6417,9 @@
               <a:spcAft>
                 <a:spcPts val="0"/>
               </a:spcAft>
-              <a:defRPr sz="1187" b="0" i="0" lang="zh-CN" dirty="0">
+              <a:defRPr sz="1187" b="1" i="0" lang="zh-CN" dirty="0">
                 <a:solidFill>
-                  <a:srgbClr val="3F4854"/>
+                  <a:srgbClr val="27303A"/>
                 </a:solidFill>
                 <a:latin typeface="DejaVu Sans"/>
                 <a:ea typeface="DejaVu Sans"/>
@@ -6427,9 +6427,9 @@
               </a:defRPr>
             </a:pPr>
             <a:r>
-              <a:rPr sz="1187" b="0" i="0" lang="zh-CN" dirty="0">
+              <a:rPr sz="1187" b="1" i="0" lang="zh-CN" dirty="0">
                 <a:solidFill>
-                  <a:srgbClr val="3F4854"/>
+                  <a:srgbClr val="27303A"/>
                 </a:solidFill>
                 <a:latin typeface="DejaVu Sans"/>
                 <a:ea typeface="DejaVu Sans"/>
@@ -6460,10 +6460,10 @@
             <a:pathLst>
               <a:path w="5940" h="12000">
                 <a:moveTo>
-                  <a:pt x="3770" y="0"/>
+                  <a:pt x="4070" y="0"/>
                 </a:moveTo>
                 <a:lnTo>
-                  <a:pt x="3770" y="5400"/>
+                  <a:pt x="4070" y="5400"/>
                 </a:lnTo>
                 <a:lnTo>
                   <a:pt x="5940" y="5400"/>
@@ -6475,17 +6475,17 @@
                   <a:pt x="0" y="5400"/>
                 </a:lnTo>
                 <a:lnTo>
-                  <a:pt x="2170" y="5400"/>
+                  <a:pt x="1870" y="5400"/>
                 </a:lnTo>
                 <a:lnTo>
-                  <a:pt x="2170" y="0"/>
+                  <a:pt x="1870" y="0"/>
                 </a:lnTo>
                 <a:close/>
               </a:path>
             </a:pathLst>
           </a:custGeom>
           <a:solidFill>
-            <a:srgbClr val="4B5563"/>
+            <a:srgbClr val="3C4753"/>
           </a:solidFill>
           <a:ln>
             <a:noFill/>
@@ -6533,7 +6533,7 @@
           <a:solidFill>
             <a:srgbClr val="FFFFFF"/>
           </a:solidFill>
-          <a:ln w="11112">
+          <a:ln w="15081">
             <a:solidFill>
               <a:srgbClr val="1F7F8C"/>
             </a:solidFill>
@@ -6681,9 +6681,9 @@
             </a:avLst>
           </a:prstGeom>
           <a:noFill/>
-          <a:ln w="9207">
+          <a:ln w="18216">
             <a:solidFill>
-              <a:srgbClr val="1F2937"/>
+              <a:srgbClr val="111A24"/>
             </a:solidFill>
           </a:ln>
           <a:effectLst/>
@@ -6724,9 +6724,9 @@
           <a:prstGeom prst="line">
             <a:avLst/>
           </a:prstGeom>
-          <a:ln w="9207">
+          <a:ln w="18216">
             <a:solidFill>
-              <a:srgbClr val="1F2937"/>
+              <a:srgbClr val="111A24"/>
             </a:solidFill>
           </a:ln>
           <a:effectLst/>
@@ -6761,9 +6761,9 @@
             <a:avLst/>
           </a:prstGeom>
           <a:noFill/>
-          <a:ln w="9207">
+          <a:ln w="18216">
             <a:solidFill>
-              <a:srgbClr val="1F2937"/>
+              <a:srgbClr val="111A24"/>
             </a:solidFill>
           </a:ln>
           <a:effectLst/>
@@ -6805,9 +6805,9 @@
             <a:avLst/>
           </a:prstGeom>
           <a:noFill/>
-          <a:ln w="9207">
+          <a:ln w="18216">
             <a:solidFill>
-              <a:srgbClr val="1F2937"/>
+              <a:srgbClr val="111A24"/>
             </a:solidFill>
           </a:ln>
           <a:effectLst/>
@@ -6849,9 +6849,9 @@
             <a:avLst/>
           </a:prstGeom>
           <a:noFill/>
-          <a:ln w="9207">
+          <a:ln w="18216">
             <a:solidFill>
-              <a:srgbClr val="1F2937"/>
+              <a:srgbClr val="111A24"/>
             </a:solidFill>
           </a:ln>
           <a:effectLst/>
@@ -6895,11 +6895,11 @@
             </a:avLst>
           </a:prstGeom>
           <a:solidFill>
-            <a:srgbClr val="F7F9FB"/>
+            <a:srgbClr val="F4F7FA"/>
           </a:solidFill>
-          <a:ln w="9524">
+          <a:ln w="12699">
             <a:solidFill>
-              <a:srgbClr val="CBD3DA"/>
+              <a:srgbClr val="AEBBC7"/>
             </a:solidFill>
           </a:ln>
           <a:effectLst/>
@@ -6959,9 +6959,9 @@
               <a:spcAft>
                 <a:spcPts val="0"/>
               </a:spcAft>
-              <a:defRPr sz="1187" b="0" i="0" lang="zh-CN" dirty="0">
+              <a:defRPr sz="1187" b="1" i="0" lang="zh-CN" dirty="0">
                 <a:solidFill>
-                  <a:srgbClr val="3F4854"/>
+                  <a:srgbClr val="27303A"/>
                 </a:solidFill>
                 <a:latin typeface="DejaVu Sans"/>
                 <a:ea typeface="DejaVu Sans"/>
@@ -6969,9 +6969,9 @@
               </a:defRPr>
             </a:pPr>
             <a:r>
-              <a:rPr sz="1187" b="0" i="0" lang="zh-CN" dirty="0">
+              <a:rPr sz="1187" b="1" i="0" lang="zh-CN" dirty="0">
                 <a:solidFill>
-                  <a:srgbClr val="3F4854"/>
+                  <a:srgbClr val="27303A"/>
                 </a:solidFill>
                 <a:latin typeface="DejaVu Sans"/>
                 <a:ea typeface="DejaVu Sans"/>
@@ -6999,11 +6999,11 @@
             </a:avLst>
           </a:prstGeom>
           <a:solidFill>
-            <a:srgbClr val="F7F9FB"/>
+            <a:srgbClr val="F4F7FA"/>
           </a:solidFill>
-          <a:ln w="9524">
+          <a:ln w="12699">
             <a:solidFill>
-              <a:srgbClr val="CBD3DA"/>
+              <a:srgbClr val="AEBBC7"/>
             </a:solidFill>
           </a:ln>
           <a:effectLst/>
@@ -7063,9 +7063,9 @@
               <a:spcAft>
                 <a:spcPts val="0"/>
               </a:spcAft>
-              <a:defRPr sz="1187" b="0" i="0" lang="zh-CN" dirty="0">
+              <a:defRPr sz="1187" b="1" i="0" lang="zh-CN" dirty="0">
                 <a:solidFill>
-                  <a:srgbClr val="3F4854"/>
+                  <a:srgbClr val="27303A"/>
                 </a:solidFill>
                 <a:latin typeface="DejaVu Sans"/>
                 <a:ea typeface="DejaVu Sans"/>
@@ -7073,9 +7073,9 @@
               </a:defRPr>
             </a:pPr>
             <a:r>
-              <a:rPr sz="1187" b="0" i="0" lang="zh-CN" dirty="0">
+              <a:rPr sz="1187" b="1" i="0" lang="zh-CN" dirty="0">
                 <a:solidFill>
-                  <a:srgbClr val="3F4854"/>
+                  <a:srgbClr val="27303A"/>
                 </a:solidFill>
                 <a:latin typeface="DejaVu Sans"/>
                 <a:ea typeface="DejaVu Sans"/>
@@ -7106,10 +7106,10 @@
             <a:pathLst>
               <a:path w="5940" h="12000">
                 <a:moveTo>
-                  <a:pt x="3770" y="0"/>
+                  <a:pt x="4070" y="0"/>
                 </a:moveTo>
                 <a:lnTo>
-                  <a:pt x="3770" y="5400"/>
+                  <a:pt x="4070" y="5400"/>
                 </a:lnTo>
                 <a:lnTo>
                   <a:pt x="5940" y="5400"/>
@@ -7121,17 +7121,17 @@
                   <a:pt x="0" y="5400"/>
                 </a:lnTo>
                 <a:lnTo>
-                  <a:pt x="2170" y="5400"/>
+                  <a:pt x="1870" y="5400"/>
                 </a:lnTo>
                 <a:lnTo>
-                  <a:pt x="2170" y="0"/>
+                  <a:pt x="1870" y="0"/>
                 </a:lnTo>
                 <a:close/>
               </a:path>
             </a:pathLst>
           </a:custGeom>
           <a:solidFill>
-            <a:srgbClr val="4B5563"/>
+            <a:srgbClr val="3C4753"/>
           </a:solidFill>
           <a:ln>
             <a:noFill/>
@@ -7177,11 +7177,11 @@
             </a:avLst>
           </a:prstGeom>
           <a:solidFill>
-            <a:srgbClr val="F7F9FB"/>
+            <a:srgbClr val="F4F7FA"/>
           </a:solidFill>
-          <a:ln w="9524">
+          <a:ln w="12699">
             <a:solidFill>
-              <a:srgbClr val="CBD3DA"/>
+              <a:srgbClr val="AEBBC7"/>
             </a:solidFill>
           </a:ln>
           <a:effectLst/>
@@ -7241,9 +7241,9 @@
               <a:spcAft>
                 <a:spcPts val="0"/>
               </a:spcAft>
-              <a:defRPr sz="1187" b="0" i="0" lang="zh-CN" dirty="0">
+              <a:defRPr sz="1187" b="1" i="0" lang="zh-CN" dirty="0">
                 <a:solidFill>
-                  <a:srgbClr val="3F4854"/>
+                  <a:srgbClr val="27303A"/>
                 </a:solidFill>
                 <a:latin typeface="DejaVu Sans"/>
                 <a:ea typeface="DejaVu Sans"/>
@@ -7251,9 +7251,9 @@
               </a:defRPr>
             </a:pPr>
             <a:r>
-              <a:rPr sz="1187" b="0" i="0" lang="zh-CN" dirty="0">
+              <a:rPr sz="1187" b="1" i="0" lang="zh-CN" dirty="0">
                 <a:solidFill>
-                  <a:srgbClr val="3F4854"/>
+                  <a:srgbClr val="27303A"/>
                 </a:solidFill>
                 <a:latin typeface="DejaVu Sans"/>
                 <a:ea typeface="DejaVu Sans"/>
@@ -7284,10 +7284,10 @@
             <a:pathLst>
               <a:path w="5940" h="12000">
                 <a:moveTo>
-                  <a:pt x="3770" y="0"/>
+                  <a:pt x="4070" y="0"/>
                 </a:moveTo>
                 <a:lnTo>
-                  <a:pt x="3770" y="5400"/>
+                  <a:pt x="4070" y="5400"/>
                 </a:lnTo>
                 <a:lnTo>
                   <a:pt x="5940" y="5400"/>
@@ -7299,17 +7299,17 @@
                   <a:pt x="0" y="5400"/>
                 </a:lnTo>
                 <a:lnTo>
-                  <a:pt x="2170" y="5400"/>
+                  <a:pt x="1870" y="5400"/>
                 </a:lnTo>
                 <a:lnTo>
-                  <a:pt x="2170" y="0"/>
+                  <a:pt x="1870" y="0"/>
                 </a:lnTo>
                 <a:close/>
               </a:path>
             </a:pathLst>
           </a:custGeom>
           <a:solidFill>
-            <a:srgbClr val="4B5563"/>
+            <a:srgbClr val="3C4753"/>
           </a:solidFill>
           <a:ln>
             <a:noFill/>
@@ -7357,12 +7357,12 @@
           <a:solidFill>
             <a:srgbClr val="FFFFFF"/>
           </a:solidFill>
-          <a:ln w="11112">
+          <a:ln w="15081">
             <a:solidFill>
               <a:srgbClr val="9AA3AB"/>
             </a:solidFill>
             <a:custDash>
-              <a:ds d="857143" sp="571429"/>
+              <a:ds d="631579" sp="421053"/>
             </a:custDash>
           </a:ln>
           <a:effectLst/>
@@ -7459,9 +7459,9 @@
           <a:prstGeom prst="line">
             <a:avLst/>
           </a:prstGeom>
-          <a:ln w="9207">
+          <a:ln w="18216">
             <a:solidFill>
-              <a:srgbClr val="1F2937"/>
+              <a:srgbClr val="111A24"/>
             </a:solidFill>
           </a:ln>
           <a:effectLst/>
@@ -7495,9 +7495,9 @@
           <a:prstGeom prst="line">
             <a:avLst/>
           </a:prstGeom>
-          <a:ln w="9207">
+          <a:ln w="18216">
             <a:solidFill>
-              <a:srgbClr val="1F2937"/>
+              <a:srgbClr val="111A24"/>
             </a:solidFill>
           </a:ln>
           <a:effectLst/>
@@ -7531,9 +7531,9 @@
           <a:prstGeom prst="line">
             <a:avLst/>
           </a:prstGeom>
-          <a:ln w="9207">
+          <a:ln w="18216">
             <a:solidFill>
-              <a:srgbClr val="1F2937"/>
+              <a:srgbClr val="111A24"/>
             </a:solidFill>
           </a:ln>
           <a:effectLst/>
@@ -7567,9 +7567,9 @@
           <a:prstGeom prst="line">
             <a:avLst/>
           </a:prstGeom>
-          <a:ln w="9207">
+          <a:ln w="18216">
             <a:solidFill>
-              <a:srgbClr val="1F2937"/>
+              <a:srgbClr val="111A24"/>
             </a:solidFill>
           </a:ln>
           <a:effectLst/>
@@ -7603,9 +7603,9 @@
           <a:prstGeom prst="line">
             <a:avLst/>
           </a:prstGeom>
-          <a:ln w="9207">
+          <a:ln w="18216">
             <a:solidFill>
-              <a:srgbClr val="1F2937"/>
+              <a:srgbClr val="111A24"/>
             </a:solidFill>
           </a:ln>
           <a:effectLst/>
@@ -7639,9 +7639,9 @@
           <a:prstGeom prst="line">
             <a:avLst/>
           </a:prstGeom>
-          <a:ln w="9207">
+          <a:ln w="18216">
             <a:solidFill>
-              <a:srgbClr val="1F2937"/>
+              <a:srgbClr val="111A24"/>
             </a:solidFill>
           </a:ln>
           <a:effectLst/>
@@ -7675,9 +7675,9 @@
           <a:prstGeom prst="line">
             <a:avLst/>
           </a:prstGeom>
-          <a:ln w="9207">
+          <a:ln w="18216">
             <a:solidFill>
-              <a:srgbClr val="1F2937"/>
+              <a:srgbClr val="111A24"/>
             </a:solidFill>
           </a:ln>
           <a:effectLst/>
@@ -7711,9 +7711,9 @@
           <a:prstGeom prst="line">
             <a:avLst/>
           </a:prstGeom>
-          <a:ln w="9207">
+          <a:ln w="18216">
             <a:solidFill>
-              <a:srgbClr val="1F2937"/>
+              <a:srgbClr val="111A24"/>
             </a:solidFill>
           </a:ln>
           <a:effectLst/>
@@ -7747,9 +7747,9 @@
           <a:prstGeom prst="line">
             <a:avLst/>
           </a:prstGeom>
-          <a:ln w="9207">
+          <a:ln w="18216">
             <a:solidFill>
-              <a:srgbClr val="1F2937"/>
+              <a:srgbClr val="111A24"/>
             </a:solidFill>
           </a:ln>
           <a:effectLst/>
@@ -7786,11 +7786,11 @@
             </a:avLst>
           </a:prstGeom>
           <a:solidFill>
-            <a:srgbClr val="F7F9FB"/>
+            <a:srgbClr val="F4F7FA"/>
           </a:solidFill>
-          <a:ln w="9524">
+          <a:ln w="12699">
             <a:solidFill>
-              <a:srgbClr val="CBD3DA"/>
+              <a:srgbClr val="AEBBC7"/>
             </a:solidFill>
           </a:ln>
           <a:effectLst/>
@@ -7850,9 +7850,9 @@
               <a:spcAft>
                 <a:spcPts val="0"/>
               </a:spcAft>
-              <a:defRPr sz="1187" b="0" i="0" lang="zh-CN" dirty="0">
+              <a:defRPr sz="1187" b="1" i="0" lang="zh-CN" dirty="0">
                 <a:solidFill>
-                  <a:srgbClr val="3F4854"/>
+                  <a:srgbClr val="27303A"/>
                 </a:solidFill>
                 <a:latin typeface="DejaVu Sans"/>
                 <a:ea typeface="DejaVu Sans"/>
@@ -7860,9 +7860,9 @@
               </a:defRPr>
             </a:pPr>
             <a:r>
-              <a:rPr sz="1187" b="0" i="0" lang="zh-CN" dirty="0">
+              <a:rPr sz="1187" b="1" i="0" lang="zh-CN" dirty="0">
                 <a:solidFill>
-                  <a:srgbClr val="3F4854"/>
+                  <a:srgbClr val="27303A"/>
                 </a:solidFill>
                 <a:latin typeface="DejaVu Sans"/>
                 <a:ea typeface="DejaVu Sans"/>
@@ -7890,11 +7890,11 @@
             </a:avLst>
           </a:prstGeom>
           <a:solidFill>
-            <a:srgbClr val="F7F9FB"/>
+            <a:srgbClr val="F4F7FA"/>
           </a:solidFill>
-          <a:ln w="9524">
+          <a:ln w="12699">
             <a:solidFill>
-              <a:srgbClr val="CBD3DA"/>
+              <a:srgbClr val="AEBBC7"/>
             </a:solidFill>
           </a:ln>
           <a:effectLst/>
@@ -7954,9 +7954,9 @@
               <a:spcAft>
                 <a:spcPts val="0"/>
               </a:spcAft>
-              <a:defRPr sz="1187" b="0" i="0" lang="zh-CN" dirty="0">
+              <a:defRPr sz="1187" b="1" i="0" lang="zh-CN" dirty="0">
                 <a:solidFill>
-                  <a:srgbClr val="3F4854"/>
+                  <a:srgbClr val="27303A"/>
                 </a:solidFill>
                 <a:latin typeface="DejaVu Sans"/>
                 <a:ea typeface="DejaVu Sans"/>
@@ -7964,9 +7964,9 @@
               </a:defRPr>
             </a:pPr>
             <a:r>
-              <a:rPr sz="1187" b="0" i="0" lang="zh-CN" dirty="0">
+              <a:rPr sz="1187" b="1" i="0" lang="zh-CN" dirty="0">
                 <a:solidFill>
-                  <a:srgbClr val="3F4854"/>
+                  <a:srgbClr val="27303A"/>
                 </a:solidFill>
                 <a:latin typeface="DejaVu Sans"/>
                 <a:ea typeface="DejaVu Sans"/>
@@ -7997,10 +7997,10 @@
             <a:pathLst>
               <a:path w="5940" h="12000">
                 <a:moveTo>
-                  <a:pt x="3770" y="0"/>
+                  <a:pt x="4070" y="0"/>
                 </a:moveTo>
                 <a:lnTo>
-                  <a:pt x="3770" y="5400"/>
+                  <a:pt x="4070" y="5400"/>
                 </a:lnTo>
                 <a:lnTo>
                   <a:pt x="5940" y="5400"/>
@@ -8012,17 +8012,17 @@
                   <a:pt x="0" y="5400"/>
                 </a:lnTo>
                 <a:lnTo>
-                  <a:pt x="2170" y="5400"/>
+                  <a:pt x="1870" y="5400"/>
                 </a:lnTo>
                 <a:lnTo>
-                  <a:pt x="2170" y="0"/>
+                  <a:pt x="1870" y="0"/>
                 </a:lnTo>
                 <a:close/>
               </a:path>
             </a:pathLst>
           </a:custGeom>
           <a:solidFill>
-            <a:srgbClr val="4B5563"/>
+            <a:srgbClr val="3C4753"/>
           </a:solidFill>
           <a:ln>
             <a:noFill/>
@@ -8068,11 +8068,11 @@
             </a:avLst>
           </a:prstGeom>
           <a:solidFill>
-            <a:srgbClr val="F7F9FB"/>
+            <a:srgbClr val="F4F7FA"/>
           </a:solidFill>
-          <a:ln w="9524">
+          <a:ln w="12699">
             <a:solidFill>
-              <a:srgbClr val="CBD3DA"/>
+              <a:srgbClr val="AEBBC7"/>
             </a:solidFill>
           </a:ln>
           <a:effectLst/>
@@ -8132,9 +8132,9 @@
               <a:spcAft>
                 <a:spcPts val="0"/>
               </a:spcAft>
-              <a:defRPr sz="1187" b="0" i="0" lang="zh-CN" dirty="0">
+              <a:defRPr sz="1187" b="1" i="0" lang="zh-CN" dirty="0">
                 <a:solidFill>
-                  <a:srgbClr val="3F4854"/>
+                  <a:srgbClr val="27303A"/>
                 </a:solidFill>
                 <a:latin typeface="DejaVu Sans"/>
                 <a:ea typeface="DejaVu Sans"/>
@@ -8142,9 +8142,9 @@
               </a:defRPr>
             </a:pPr>
             <a:r>
-              <a:rPr sz="1187" b="0" i="0" lang="zh-CN" dirty="0">
+              <a:rPr sz="1187" b="1" i="0" lang="zh-CN" dirty="0">
                 <a:solidFill>
-                  <a:srgbClr val="3F4854"/>
+                  <a:srgbClr val="27303A"/>
                 </a:solidFill>
                 <a:latin typeface="DejaVu Sans"/>
                 <a:ea typeface="DejaVu Sans"/>
@@ -8175,10 +8175,10 @@
             <a:pathLst>
               <a:path w="5940" h="12000">
                 <a:moveTo>
-                  <a:pt x="3770" y="0"/>
+                  <a:pt x="4070" y="0"/>
                 </a:moveTo>
                 <a:lnTo>
-                  <a:pt x="3770" y="5400"/>
+                  <a:pt x="4070" y="5400"/>
                 </a:lnTo>
                 <a:lnTo>
                   <a:pt x="5940" y="5400"/>
@@ -8190,17 +8190,17 @@
                   <a:pt x="0" y="5400"/>
                 </a:lnTo>
                 <a:lnTo>
-                  <a:pt x="2170" y="5400"/>
+                  <a:pt x="1870" y="5400"/>
                 </a:lnTo>
                 <a:lnTo>
-                  <a:pt x="2170" y="0"/>
+                  <a:pt x="1870" y="0"/>
                 </a:lnTo>
                 <a:close/>
               </a:path>
             </a:pathLst>
           </a:custGeom>
           <a:solidFill>
-            <a:srgbClr val="4B5563"/>
+            <a:srgbClr val="3C4753"/>
           </a:solidFill>
           <a:ln>
             <a:noFill/>
@@ -8248,7 +8248,7 @@
           <a:solidFill>
             <a:srgbClr val="FFFFFF"/>
           </a:solidFill>
-          <a:ln w="11112">
+          <a:ln w="15081">
             <a:solidFill>
               <a:srgbClr val="5B7592"/>
             </a:solidFill>
@@ -8394,9 +8394,9 @@
             <a:avLst/>
           </a:prstGeom>
           <a:noFill/>
-          <a:ln w="7937">
+          <a:ln w="18216">
             <a:solidFill>
-              <a:srgbClr val="1F2937"/>
+              <a:srgbClr val="111A24"/>
             </a:solidFill>
           </a:ln>
           <a:effectLst/>
@@ -8437,9 +8437,9 @@
           <a:prstGeom prst="line">
             <a:avLst/>
           </a:prstGeom>
-          <a:ln w="7937">
+          <a:ln w="18216">
             <a:solidFill>
-              <a:srgbClr val="1F2937"/>
+              <a:srgbClr val="111A24"/>
             </a:solidFill>
           </a:ln>
           <a:effectLst/>
@@ -8473,9 +8473,9 @@
           <a:prstGeom prst="line">
             <a:avLst/>
           </a:prstGeom>
-          <a:ln w="7937">
+          <a:ln w="18216">
             <a:solidFill>
-              <a:srgbClr val="1F2937"/>
+              <a:srgbClr val="111A24"/>
             </a:solidFill>
           </a:ln>
           <a:effectLst/>
@@ -8509,9 +8509,9 @@
           <a:prstGeom prst="line">
             <a:avLst/>
           </a:prstGeom>
-          <a:ln w="7937">
+          <a:ln w="18216">
             <a:solidFill>
-              <a:srgbClr val="1F2937"/>
+              <a:srgbClr val="111A24"/>
             </a:solidFill>
           </a:ln>
           <a:effectLst/>
@@ -8546,9 +8546,9 @@
             <a:avLst/>
           </a:prstGeom>
           <a:noFill/>
-          <a:ln w="7937">
+          <a:ln w="18216">
             <a:solidFill>
-              <a:srgbClr val="1F2937"/>
+              <a:srgbClr val="111A24"/>
             </a:solidFill>
           </a:ln>
           <a:effectLst/>
@@ -8589,9 +8589,9 @@
           <a:prstGeom prst="line">
             <a:avLst/>
           </a:prstGeom>
-          <a:ln w="10318">
+          <a:ln w="23681">
             <a:solidFill>
-              <a:srgbClr val="1F2937"/>
+              <a:srgbClr val="111A24"/>
             </a:solidFill>
           </a:ln>
           <a:effectLst/>
@@ -8625,9 +8625,9 @@
           <a:prstGeom prst="line">
             <a:avLst/>
           </a:prstGeom>
-          <a:ln w="10318">
+          <a:ln w="23681">
             <a:solidFill>
-              <a:srgbClr val="1F2937"/>
+              <a:srgbClr val="111A24"/>
             </a:solidFill>
           </a:ln>
           <a:effectLst/>
@@ -8680,9 +8680,9 @@
               <a:spcAft>
                 <a:spcPts val="0"/>
               </a:spcAft>
-              <a:defRPr sz="1249" b="0" i="0" lang="zh-CN" dirty="0">
+              <a:defRPr sz="1249" b="1" i="0" lang="zh-CN" dirty="0">
                 <a:solidFill>
-                  <a:srgbClr val="3F4854"/>
+                  <a:srgbClr val="27303A"/>
                 </a:solidFill>
                 <a:latin typeface="DejaVu Sans"/>
                 <a:ea typeface="DejaVu Sans"/>
@@ -8690,9 +8690,9 @@
               </a:defRPr>
             </a:pPr>
             <a:r>
-              <a:rPr sz="1249" b="0" i="0" lang="zh-CN" dirty="0">
+              <a:rPr sz="1249" b="1" i="0" lang="zh-CN" dirty="0">
                 <a:solidFill>
-                  <a:srgbClr val="3F4854"/>
+                  <a:srgbClr val="27303A"/>
                 </a:solidFill>
                 <a:latin typeface="DejaVu Sans"/>
                 <a:ea typeface="DejaVu Sans"/>
@@ -8720,9 +8720,9 @@
             </a:avLst>
           </a:prstGeom>
           <a:noFill/>
-          <a:ln w="7937">
+          <a:ln w="18216">
             <a:solidFill>
-              <a:srgbClr val="1F2937"/>
+              <a:srgbClr val="111A24"/>
             </a:solidFill>
           </a:ln>
           <a:effectLst/>
@@ -8764,9 +8764,9 @@
             <a:avLst/>
           </a:prstGeom>
           <a:noFill/>
-          <a:ln w="7937">
+          <a:ln w="18216">
             <a:solidFill>
-              <a:srgbClr val="1F2937"/>
+              <a:srgbClr val="111A24"/>
             </a:solidFill>
           </a:ln>
           <a:effectLst/>
@@ -8807,9 +8807,9 @@
           <a:prstGeom prst="line">
             <a:avLst/>
           </a:prstGeom>
-          <a:ln w="7937">
+          <a:ln w="18216">
             <a:solidFill>
-              <a:srgbClr val="1F2937"/>
+              <a:srgbClr val="111A24"/>
             </a:solidFill>
           </a:ln>
           <a:effectLst/>
@@ -8843,9 +8843,9 @@
           <a:prstGeom prst="line">
             <a:avLst/>
           </a:prstGeom>
-          <a:ln w="7937">
+          <a:ln w="18216">
             <a:solidFill>
-              <a:srgbClr val="1F2937"/>
+              <a:srgbClr val="111A24"/>
             </a:solidFill>
           </a:ln>
           <a:effectLst/>
@@ -8879,9 +8879,9 @@
           <a:prstGeom prst="line">
             <a:avLst/>
           </a:prstGeom>
-          <a:ln w="7937">
+          <a:ln w="18216">
             <a:solidFill>
-              <a:srgbClr val="1F2937"/>
+              <a:srgbClr val="111A24"/>
             </a:solidFill>
           </a:ln>
           <a:effectLst/>
@@ -8916,9 +8916,9 @@
             <a:avLst/>
           </a:prstGeom>
           <a:noFill/>
-          <a:ln w="7937">
+          <a:ln w="18216">
             <a:solidFill>
-              <a:srgbClr val="1F2937"/>
+              <a:srgbClr val="111A24"/>
             </a:solidFill>
           </a:ln>
           <a:effectLst/>
@@ -8959,9 +8959,9 @@
           <a:prstGeom prst="line">
             <a:avLst/>
           </a:prstGeom>
-          <a:ln w="10318">
+          <a:ln w="23681">
             <a:solidFill>
-              <a:srgbClr val="1F2937"/>
+              <a:srgbClr val="111A24"/>
             </a:solidFill>
           </a:ln>
           <a:effectLst/>
@@ -8995,9 +8995,9 @@
           <a:prstGeom prst="line">
             <a:avLst/>
           </a:prstGeom>
-          <a:ln w="10318">
+          <a:ln w="23681">
             <a:solidFill>
-              <a:srgbClr val="1F2937"/>
+              <a:srgbClr val="111A24"/>
             </a:solidFill>
           </a:ln>
           <a:effectLst/>
@@ -9026,6 +9026,878 @@
         <p:spPr>
           <a:xfrm>
             <a:off x="3047999" y="5032374"/>
+            <a:ext cx="2270124" cy="253999"/>
+          </a:xfrm>
+          <a:prstGeom prst="rect">
+            <a:avLst/>
+          </a:prstGeom>
+          <a:noFill/>
+          <a:effectLst/>
+        </p:spPr>
+        <p:txBody>
+          <a:bodyPr wrap="none" anchor="ctr" tIns="0" rIns="0" bIns="0" lIns="0" anchorCtr="0" vertOverflow="overflow">
+            <a:noAutofit/>
+          </a:bodyPr>
+          <a:lstStyle/>
+          <a:p>
+            <a:pPr algn="ctr" fontAlgn="base">
+              <a:lnSpc>
+                <a:spcPts val="1187"/>
+              </a:lnSpc>
+              <a:spcBef>
+                <a:spcPts val="0"/>
+              </a:spcBef>
+              <a:spcAft>
+                <a:spcPts val="0"/>
+              </a:spcAft>
+              <a:defRPr sz="1007" b="1" i="0" lang="zh-CN" dirty="0">
+                <a:solidFill>
+                  <a:srgbClr val="27303A"/>
+                </a:solidFill>
+                <a:latin typeface="DejaVu Sans"/>
+                <a:ea typeface="DejaVu Sans"/>
+                <a:cs typeface="DejaVu Sans"/>
+              </a:defRPr>
+            </a:pPr>
+            <a:r>
+              <a:rPr sz="1007" b="1" i="0" lang="zh-CN" dirty="0">
+                <a:solidFill>
+                  <a:srgbClr val="27303A"/>
+                </a:solidFill>
+                <a:latin typeface="DejaVu Sans"/>
+                <a:ea typeface="DejaVu Sans"/>
+                <a:cs typeface="DejaVu Sans"/>
+              </a:rPr>
+              <a:t>Temperature–time, atmosphere</a:t>
+            </a:r>
+          </a:p>
+        </p:txBody>
+      </p:sp>
+      <p:cxnSp>
+        <p:nvCxnSpPr>
+          <p:cNvPr id="118" name="cl1_s" descr="Editable line; source id cl1_s"/>
+          <p:cNvCxnSpPr/>
+          <p:nvPr/>
+        </p:nvCxnSpPr>
+        <p:spPr>
+          <a:xfrm>
+            <a:off x="2952749" y="4540249"/>
+            <a:ext cx="0" cy="762000"/>
+          </a:xfrm>
+          <a:prstGeom prst="line">
+            <a:avLst/>
+          </a:prstGeom>
+          <a:ln w="9524">
+            <a:solidFill>
+              <a:srgbClr val="E3E8ED"/>
+            </a:solidFill>
+          </a:ln>
+          <a:effectLst/>
+        </p:spPr>
+        <p:style>
+          <a:lnRef idx="2">
+            <a:schemeClr val="accent1"/>
+          </a:lnRef>
+          <a:fillRef idx="0">
+            <a:schemeClr val="accent1"/>
+          </a:fillRef>
+          <a:effectRef idx="0">
+            <a:schemeClr val="accent1"/>
+          </a:effectRef>
+          <a:fontRef idx="minor">
+            <a:schemeClr val="tx1"/>
+          </a:fontRef>
+        </p:style>
+      </p:cxnSp>
+      <p:cxnSp>
+        <p:nvCxnSpPr>
+          <p:cNvPr id="119" name="cl2_g_b_0" descr="Editable line; source id cl2_g_b_0"/>
+          <p:cNvCxnSpPr/>
+          <p:nvPr/>
+        </p:nvCxnSpPr>
+        <p:spPr>
+          <a:xfrm>
+            <a:off x="6262687" y="4683124"/>
+            <a:ext cx="39687" cy="198438"/>
+          </a:xfrm>
+          <a:prstGeom prst="line">
+            <a:avLst/>
+          </a:prstGeom>
+          <a:ln w="18216">
+            <a:solidFill>
+              <a:srgbClr val="111A24"/>
+            </a:solidFill>
+          </a:ln>
+          <a:effectLst/>
+        </p:spPr>
+        <p:style>
+          <a:lnRef idx="2">
+            <a:schemeClr val="accent1"/>
+          </a:lnRef>
+          <a:fillRef idx="0">
+            <a:schemeClr val="accent1"/>
+          </a:fillRef>
+          <a:effectRef idx="0">
+            <a:schemeClr val="accent1"/>
+          </a:effectRef>
+          <a:fontRef idx="minor">
+            <a:schemeClr val="tx1"/>
+          </a:fontRef>
+        </p:style>
+      </p:cxnSp>
+      <p:cxnSp>
+        <p:nvCxnSpPr>
+          <p:cNvPr id="120" name="cl2_g_b_1" descr="Editable line; source id cl2_g_b_1"/>
+          <p:cNvCxnSpPr/>
+          <p:nvPr/>
+        </p:nvCxnSpPr>
+        <p:spPr>
+          <a:xfrm>
+            <a:off x="6302374" y="4881562"/>
+            <a:ext cx="127000" cy="0"/>
+          </a:xfrm>
+          <a:prstGeom prst="line">
+            <a:avLst/>
+          </a:prstGeom>
+          <a:ln w="18216">
+            <a:solidFill>
+              <a:srgbClr val="111A24"/>
+            </a:solidFill>
+          </a:ln>
+          <a:effectLst/>
+        </p:spPr>
+        <p:style>
+          <a:lnRef idx="2">
+            <a:schemeClr val="accent1"/>
+          </a:lnRef>
+          <a:fillRef idx="0">
+            <a:schemeClr val="accent1"/>
+          </a:fillRef>
+          <a:effectRef idx="0">
+            <a:schemeClr val="accent1"/>
+          </a:effectRef>
+          <a:fontRef idx="minor">
+            <a:schemeClr val="tx1"/>
+          </a:fontRef>
+        </p:style>
+      </p:cxnSp>
+      <p:cxnSp>
+        <p:nvCxnSpPr>
+          <p:cNvPr id="121" name="cl2_g_b_2" descr="Editable line; source id cl2_g_b_2"/>
+          <p:cNvCxnSpPr/>
+          <p:nvPr/>
+        </p:nvCxnSpPr>
+        <p:spPr>
+          <a:xfrm flipV="1">
+            <a:off x="6429374" y="4683124"/>
+            <a:ext cx="39688" cy="198438"/>
+          </a:xfrm>
+          <a:prstGeom prst="line">
+            <a:avLst/>
+          </a:prstGeom>
+          <a:ln w="18216">
+            <a:solidFill>
+              <a:srgbClr val="111A24"/>
+            </a:solidFill>
+          </a:ln>
+          <a:effectLst/>
+        </p:spPr>
+        <p:style>
+          <a:lnRef idx="2">
+            <a:schemeClr val="accent1"/>
+          </a:lnRef>
+          <a:fillRef idx="0">
+            <a:schemeClr val="accent1"/>
+          </a:fillRef>
+          <a:effectRef idx="0">
+            <a:schemeClr val="accent1"/>
+          </a:effectRef>
+          <a:fontRef idx="minor">
+            <a:schemeClr val="tx1"/>
+          </a:fontRef>
+        </p:style>
+      </p:cxnSp>
+      <p:cxnSp>
+        <p:nvCxnSpPr>
+          <p:cNvPr id="122" name="cl2_g_r" descr="Editable line; source id cl2_g_r"/>
+          <p:cNvCxnSpPr/>
+          <p:nvPr/>
+        </p:nvCxnSpPr>
+        <p:spPr>
+          <a:xfrm>
+            <a:off x="6238874" y="4683124"/>
+            <a:ext cx="254000" cy="0"/>
+          </a:xfrm>
+          <a:prstGeom prst="line">
+            <a:avLst/>
+          </a:prstGeom>
+          <a:ln w="18216">
+            <a:solidFill>
+              <a:srgbClr val="111A24"/>
+            </a:solidFill>
+          </a:ln>
+          <a:effectLst/>
+        </p:spPr>
+        <p:style>
+          <a:lnRef idx="2">
+            <a:schemeClr val="accent1"/>
+          </a:lnRef>
+          <a:fillRef idx="0">
+            <a:schemeClr val="accent1"/>
+          </a:fillRef>
+          <a:effectRef idx="0">
+            <a:schemeClr val="accent1"/>
+          </a:effectRef>
+          <a:fontRef idx="minor">
+            <a:schemeClr val="tx1"/>
+          </a:fontRef>
+        </p:style>
+      </p:cxnSp>
+      <p:sp>
+        <p:nvSpPr>
+          <p:cNvPr id="123" name="cl2_k_c" descr="Editable shape; source id cl2_k_c"/>
+          <p:cNvSpPr/>
+          <p:nvPr/>
+        </p:nvSpPr>
+        <p:spPr>
+          <a:xfrm>
+            <a:off x="6730999" y="4643437"/>
+            <a:ext cx="230187" cy="230187"/>
+          </a:xfrm>
+          <a:prstGeom prst="ellipse">
+            <a:avLst/>
+          </a:prstGeom>
+          <a:noFill/>
+          <a:ln w="18216">
+            <a:solidFill>
+              <a:srgbClr val="111A24"/>
+            </a:solidFill>
+          </a:ln>
+          <a:effectLst/>
+        </p:spPr>
+        <p:style>
+          <a:lnRef idx="1">
+            <a:schemeClr val="accent1"/>
+          </a:lnRef>
+          <a:fillRef idx="3">
+            <a:schemeClr val="accent1"/>
+          </a:fillRef>
+          <a:effectRef idx="0">
+            <a:schemeClr val="accent1"/>
+          </a:effectRef>
+          <a:fontRef idx="minor">
+            <a:schemeClr val="lt1"/>
+          </a:fontRef>
+        </p:style>
+        <p:txBody>
+          <a:bodyPr rtlCol="0" anchor="ctr"/>
+          <a:lstStyle/>
+          <a:p>
+            <a:pPr algn="ctr"/>
+          </a:p>
+        </p:txBody>
+      </p:sp>
+      <p:cxnSp>
+        <p:nvCxnSpPr>
+          <p:cNvPr id="124" name="cl2_k_k_0" descr="Editable line; source id cl2_k_k_0"/>
+          <p:cNvCxnSpPr/>
+          <p:nvPr/>
+        </p:nvCxnSpPr>
+        <p:spPr>
+          <a:xfrm>
+            <a:off x="6786562" y="4762499"/>
+            <a:ext cx="39687" cy="39688"/>
+          </a:xfrm>
+          <a:prstGeom prst="line">
+            <a:avLst/>
+          </a:prstGeom>
+          <a:ln w="23681">
+            <a:solidFill>
+              <a:srgbClr val="111A24"/>
+            </a:solidFill>
+          </a:ln>
+          <a:effectLst/>
+        </p:spPr>
+        <p:style>
+          <a:lnRef idx="2">
+            <a:schemeClr val="accent1"/>
+          </a:lnRef>
+          <a:fillRef idx="0">
+            <a:schemeClr val="accent1"/>
+          </a:fillRef>
+          <a:effectRef idx="0">
+            <a:schemeClr val="accent1"/>
+          </a:effectRef>
+          <a:fontRef idx="minor">
+            <a:schemeClr val="tx1"/>
+          </a:fontRef>
+        </p:style>
+      </p:cxnSp>
+      <p:cxnSp>
+        <p:nvCxnSpPr>
+          <p:cNvPr id="125" name="cl2_k_k_1" descr="Editable line; source id cl2_k_k_1"/>
+          <p:cNvCxnSpPr/>
+          <p:nvPr/>
+        </p:nvCxnSpPr>
+        <p:spPr>
+          <a:xfrm flipV="1">
+            <a:off x="6826249" y="4706937"/>
+            <a:ext cx="79375" cy="95250"/>
+          </a:xfrm>
+          <a:prstGeom prst="line">
+            <a:avLst/>
+          </a:prstGeom>
+          <a:ln w="23681">
+            <a:solidFill>
+              <a:srgbClr val="111A24"/>
+            </a:solidFill>
+          </a:ln>
+          <a:effectLst/>
+        </p:spPr>
+        <p:style>
+          <a:lnRef idx="2">
+            <a:schemeClr val="accent1"/>
+          </a:lnRef>
+          <a:fillRef idx="0">
+            <a:schemeClr val="accent1"/>
+          </a:fillRef>
+          <a:effectRef idx="0">
+            <a:schemeClr val="accent1"/>
+          </a:effectRef>
+          <a:fontRef idx="minor">
+            <a:schemeClr val="tx1"/>
+          </a:fontRef>
+        </p:style>
+      </p:cxnSp>
+      <p:sp>
+        <p:nvSpPr>
+          <p:cNvPr id="126" name="cl2_t" descr="Editable text; source id cl2_t"/>
+          <p:cNvSpPr txBox="1"/>
+          <p:nvPr/>
+        </p:nvSpPr>
+        <p:spPr>
+          <a:xfrm>
+            <a:off x="5476874" y="5032374"/>
+            <a:ext cx="2270124" cy="253999"/>
+          </a:xfrm>
+          <a:prstGeom prst="rect">
+            <a:avLst/>
+          </a:prstGeom>
+          <a:noFill/>
+          <a:effectLst/>
+        </p:spPr>
+        <p:txBody>
+          <a:bodyPr wrap="none" anchor="ctr" tIns="0" rIns="0" bIns="0" lIns="0" anchorCtr="0" vertOverflow="overflow">
+            <a:noAutofit/>
+          </a:bodyPr>
+          <a:lstStyle/>
+          <a:p>
+            <a:pPr algn="ctr" fontAlgn="base">
+              <a:lnSpc>
+                <a:spcPts val="1468"/>
+              </a:lnSpc>
+              <a:spcBef>
+                <a:spcPts val="0"/>
+              </a:spcBef>
+              <a:spcAft>
+                <a:spcPts val="0"/>
+              </a:spcAft>
+              <a:defRPr sz="1249" b="1" i="0" lang="zh-CN" dirty="0">
+                <a:solidFill>
+                  <a:srgbClr val="27303A"/>
+                </a:solidFill>
+                <a:latin typeface="DejaVu Sans"/>
+                <a:ea typeface="DejaVu Sans"/>
+                <a:cs typeface="DejaVu Sans"/>
+              </a:defRPr>
+            </a:pPr>
+            <a:r>
+              <a:rPr sz="1249" b="1" i="0" lang="zh-CN" dirty="0">
+                <a:solidFill>
+                  <a:srgbClr val="27303A"/>
+                </a:solidFill>
+                <a:latin typeface="DejaVu Sans"/>
+                <a:ea typeface="DejaVu Sans"/>
+                <a:cs typeface="DejaVu Sans"/>
+              </a:rPr>
+              <a:t>Crucible, flux</a:t>
+            </a:r>
+          </a:p>
+        </p:txBody>
+      </p:sp>
+      <p:cxnSp>
+        <p:nvCxnSpPr>
+          <p:cNvPr id="127" name="cl2_s" descr="Editable line; source id cl2_s"/>
+          <p:cNvCxnSpPr/>
+          <p:nvPr/>
+        </p:nvCxnSpPr>
+        <p:spPr>
+          <a:xfrm>
+            <a:off x="5381624" y="4540249"/>
+            <a:ext cx="0" cy="762000"/>
+          </a:xfrm>
+          <a:prstGeom prst="line">
+            <a:avLst/>
+          </a:prstGeom>
+          <a:ln w="9524">
+            <a:solidFill>
+              <a:srgbClr val="E3E8ED"/>
+            </a:solidFill>
+          </a:ln>
+          <a:effectLst/>
+        </p:spPr>
+        <p:style>
+          <a:lnRef idx="2">
+            <a:schemeClr val="accent1"/>
+          </a:lnRef>
+          <a:fillRef idx="0">
+            <a:schemeClr val="accent1"/>
+          </a:fillRef>
+          <a:effectRef idx="0">
+            <a:schemeClr val="accent1"/>
+          </a:effectRef>
+          <a:fontRef idx="minor">
+            <a:schemeClr val="tx1"/>
+          </a:fontRef>
+        </p:style>
+      </p:cxnSp>
+      <p:cxnSp>
+        <p:nvCxnSpPr>
+          <p:cNvPr id="128" name="cl3_g_d_0" descr="Editable line; source id cl3_g_d_0"/>
+          <p:cNvCxnSpPr/>
+          <p:nvPr/>
+        </p:nvCxnSpPr>
+        <p:spPr>
+          <a:xfrm>
+            <a:off x="8794749" y="4611687"/>
+            <a:ext cx="87313" cy="127000"/>
+          </a:xfrm>
+          <a:prstGeom prst="line">
+            <a:avLst/>
+          </a:prstGeom>
+          <a:ln w="18216">
+            <a:solidFill>
+              <a:srgbClr val="111A24"/>
+            </a:solidFill>
+          </a:ln>
+          <a:effectLst/>
+        </p:spPr>
+        <p:style>
+          <a:lnRef idx="2">
+            <a:schemeClr val="accent1"/>
+          </a:lnRef>
+          <a:fillRef idx="0">
+            <a:schemeClr val="accent1"/>
+          </a:fillRef>
+          <a:effectRef idx="0">
+            <a:schemeClr val="accent1"/>
+          </a:effectRef>
+          <a:fontRef idx="minor">
+            <a:schemeClr val="tx1"/>
+          </a:fontRef>
+        </p:style>
+      </p:cxnSp>
+      <p:cxnSp>
+        <p:nvCxnSpPr>
+          <p:cNvPr id="129" name="cl3_g_d_1" descr="Editable line; source id cl3_g_d_1"/>
+          <p:cNvCxnSpPr/>
+          <p:nvPr/>
+        </p:nvCxnSpPr>
+        <p:spPr>
+          <a:xfrm flipH="1">
+            <a:off x="8842374" y="4738687"/>
+            <a:ext cx="39688" cy="79375"/>
+          </a:xfrm>
+          <a:prstGeom prst="line">
+            <a:avLst/>
+          </a:prstGeom>
+          <a:ln w="18216">
+            <a:solidFill>
+              <a:srgbClr val="111A24"/>
+            </a:solidFill>
+          </a:ln>
+          <a:effectLst/>
+        </p:spPr>
+        <p:style>
+          <a:lnRef idx="2">
+            <a:schemeClr val="accent1"/>
+          </a:lnRef>
+          <a:fillRef idx="0">
+            <a:schemeClr val="accent1"/>
+          </a:fillRef>
+          <a:effectRef idx="0">
+            <a:schemeClr val="accent1"/>
+          </a:effectRef>
+          <a:fontRef idx="minor">
+            <a:schemeClr val="tx1"/>
+          </a:fontRef>
+        </p:style>
+      </p:cxnSp>
+      <p:cxnSp>
+        <p:nvCxnSpPr>
+          <p:cNvPr id="130" name="cl3_g_d_2" descr="Editable line; source id cl3_g_d_2"/>
+          <p:cNvCxnSpPr/>
+          <p:nvPr/>
+        </p:nvCxnSpPr>
+        <p:spPr>
+          <a:xfrm flipH="1">
+            <a:off x="8747124" y="4818062"/>
+            <a:ext cx="95250" cy="0"/>
+          </a:xfrm>
+          <a:prstGeom prst="line">
+            <a:avLst/>
+          </a:prstGeom>
+          <a:ln w="18216">
+            <a:solidFill>
+              <a:srgbClr val="111A24"/>
+            </a:solidFill>
+          </a:ln>
+          <a:effectLst/>
+        </p:spPr>
+        <p:style>
+          <a:lnRef idx="2">
+            <a:schemeClr val="accent1"/>
+          </a:lnRef>
+          <a:fillRef idx="0">
+            <a:schemeClr val="accent1"/>
+          </a:fillRef>
+          <a:effectRef idx="0">
+            <a:schemeClr val="accent1"/>
+          </a:effectRef>
+          <a:fontRef idx="minor">
+            <a:schemeClr val="tx1"/>
+          </a:fontRef>
+        </p:style>
+      </p:cxnSp>
+      <p:cxnSp>
+        <p:nvCxnSpPr>
+          <p:cNvPr id="131" name="cl3_g_d_3" descr="Editable line; source id cl3_g_d_3"/>
+          <p:cNvCxnSpPr/>
+          <p:nvPr/>
+        </p:nvCxnSpPr>
+        <p:spPr>
+          <a:xfrm flipH="1" flipV="1">
+            <a:off x="8707437" y="4738687"/>
+            <a:ext cx="39687" cy="79375"/>
+          </a:xfrm>
+          <a:prstGeom prst="line">
+            <a:avLst/>
+          </a:prstGeom>
+          <a:ln w="18216">
+            <a:solidFill>
+              <a:srgbClr val="111A24"/>
+            </a:solidFill>
+          </a:ln>
+          <a:effectLst/>
+        </p:spPr>
+        <p:style>
+          <a:lnRef idx="2">
+            <a:schemeClr val="accent1"/>
+          </a:lnRef>
+          <a:fillRef idx="0">
+            <a:schemeClr val="accent1"/>
+          </a:fillRef>
+          <a:effectRef idx="0">
+            <a:schemeClr val="accent1"/>
+          </a:effectRef>
+          <a:fontRef idx="minor">
+            <a:schemeClr val="tx1"/>
+          </a:fontRef>
+        </p:style>
+      </p:cxnSp>
+      <p:cxnSp>
+        <p:nvCxnSpPr>
+          <p:cNvPr id="132" name="cl3_g_d_4" descr="Editable line; source id cl3_g_d_4"/>
+          <p:cNvCxnSpPr/>
+          <p:nvPr/>
+        </p:nvCxnSpPr>
+        <p:spPr>
+          <a:xfrm flipV="1">
+            <a:off x="8707437" y="4611687"/>
+            <a:ext cx="87312" cy="127000"/>
+          </a:xfrm>
+          <a:prstGeom prst="line">
+            <a:avLst/>
+          </a:prstGeom>
+          <a:ln w="18216">
+            <a:solidFill>
+              <a:srgbClr val="111A24"/>
+            </a:solidFill>
+          </a:ln>
+          <a:effectLst/>
+        </p:spPr>
+        <p:style>
+          <a:lnRef idx="2">
+            <a:schemeClr val="accent1"/>
+          </a:lnRef>
+          <a:fillRef idx="0">
+            <a:schemeClr val="accent1"/>
+          </a:fillRef>
+          <a:effectRef idx="0">
+            <a:schemeClr val="accent1"/>
+          </a:effectRef>
+          <a:fontRef idx="minor">
+            <a:schemeClr val="tx1"/>
+          </a:fontRef>
+        </p:style>
+      </p:cxnSp>
+      <p:sp>
+        <p:nvSpPr>
+          <p:cNvPr id="133" name="cl3_g_n0" descr="Editable shape; source id cl3_g_n0"/>
+          <p:cNvSpPr/>
+          <p:nvPr/>
+        </p:nvSpPr>
+        <p:spPr>
+          <a:xfrm>
+            <a:off x="8723312" y="4857749"/>
+            <a:ext cx="47624" cy="47624"/>
+          </a:xfrm>
+          <a:prstGeom prst="ellipse">
+            <a:avLst/>
+          </a:prstGeom>
+          <a:solidFill>
+            <a:srgbClr val="111A24"/>
+          </a:solidFill>
+          <a:ln>
+            <a:noFill/>
+          </a:ln>
+          <a:effectLst/>
+        </p:spPr>
+        <p:style>
+          <a:lnRef idx="1">
+            <a:schemeClr val="accent1"/>
+          </a:lnRef>
+          <a:fillRef idx="3">
+            <a:schemeClr val="accent1"/>
+          </a:fillRef>
+          <a:effectRef idx="0">
+            <a:schemeClr val="accent1"/>
+          </a:effectRef>
+          <a:fontRef idx="minor">
+            <a:schemeClr val="lt1"/>
+          </a:fontRef>
+        </p:style>
+        <p:txBody>
+          <a:bodyPr rtlCol="0" anchor="ctr"/>
+          <a:lstStyle/>
+          <a:p>
+            <a:pPr algn="ctr"/>
+          </a:p>
+        </p:txBody>
+      </p:sp>
+      <p:sp>
+        <p:nvSpPr>
+          <p:cNvPr id="134" name="cl3_g_n1" descr="Editable shape; source id cl3_g_n1"/>
+          <p:cNvSpPr/>
+          <p:nvPr/>
+        </p:nvSpPr>
+        <p:spPr>
+          <a:xfrm>
+            <a:off x="8786812" y="4873624"/>
+            <a:ext cx="47624" cy="47624"/>
+          </a:xfrm>
+          <a:prstGeom prst="ellipse">
+            <a:avLst/>
+          </a:prstGeom>
+          <a:solidFill>
+            <a:srgbClr val="111A24"/>
+          </a:solidFill>
+          <a:ln>
+            <a:noFill/>
+          </a:ln>
+          <a:effectLst/>
+        </p:spPr>
+        <p:style>
+          <a:lnRef idx="1">
+            <a:schemeClr val="accent1"/>
+          </a:lnRef>
+          <a:fillRef idx="3">
+            <a:schemeClr val="accent1"/>
+          </a:fillRef>
+          <a:effectRef idx="0">
+            <a:schemeClr val="accent1"/>
+          </a:effectRef>
+          <a:fontRef idx="minor">
+            <a:schemeClr val="lt1"/>
+          </a:fontRef>
+        </p:style>
+        <p:txBody>
+          <a:bodyPr rtlCol="0" anchor="ctr"/>
+          <a:lstStyle/>
+          <a:p>
+            <a:pPr algn="ctr"/>
+          </a:p>
+        </p:txBody>
+      </p:sp>
+      <p:sp>
+        <p:nvSpPr>
+          <p:cNvPr id="135" name="cl3_g_n2" descr="Editable shape; source id cl3_g_n2"/>
+          <p:cNvSpPr/>
+          <p:nvPr/>
+        </p:nvSpPr>
+        <p:spPr>
+          <a:xfrm>
+            <a:off x="8842374" y="4841874"/>
+            <a:ext cx="47624" cy="47624"/>
+          </a:xfrm>
+          <a:prstGeom prst="ellipse">
+            <a:avLst/>
+          </a:prstGeom>
+          <a:solidFill>
+            <a:srgbClr val="111A24"/>
+          </a:solidFill>
+          <a:ln>
+            <a:noFill/>
+          </a:ln>
+          <a:effectLst/>
+        </p:spPr>
+        <p:style>
+          <a:lnRef idx="1">
+            <a:schemeClr val="accent1"/>
+          </a:lnRef>
+          <a:fillRef idx="3">
+            <a:schemeClr val="accent1"/>
+          </a:fillRef>
+          <a:effectRef idx="0">
+            <a:schemeClr val="accent1"/>
+          </a:effectRef>
+          <a:fontRef idx="minor">
+            <a:schemeClr val="lt1"/>
+          </a:fontRef>
+        </p:style>
+        <p:txBody>
+          <a:bodyPr rtlCol="0" anchor="ctr"/>
+          <a:lstStyle/>
+          <a:p>
+            <a:pPr algn="ctr"/>
+          </a:p>
+        </p:txBody>
+      </p:sp>
+      <p:sp>
+        <p:nvSpPr>
+          <p:cNvPr id="136" name="cl3_k_c" descr="Editable shape; source id cl3_k_c"/>
+          <p:cNvSpPr/>
+          <p:nvPr/>
+        </p:nvSpPr>
+        <p:spPr>
+          <a:xfrm>
+            <a:off x="9159874" y="4643437"/>
+            <a:ext cx="230187" cy="230187"/>
+          </a:xfrm>
+          <a:prstGeom prst="ellipse">
+            <a:avLst/>
+          </a:prstGeom>
+          <a:noFill/>
+          <a:ln w="18216">
+            <a:solidFill>
+              <a:srgbClr val="111A24"/>
+            </a:solidFill>
+          </a:ln>
+          <a:effectLst/>
+        </p:spPr>
+        <p:style>
+          <a:lnRef idx="1">
+            <a:schemeClr val="accent1"/>
+          </a:lnRef>
+          <a:fillRef idx="3">
+            <a:schemeClr val="accent1"/>
+          </a:fillRef>
+          <a:effectRef idx="0">
+            <a:schemeClr val="accent1"/>
+          </a:effectRef>
+          <a:fontRef idx="minor">
+            <a:schemeClr val="lt1"/>
+          </a:fontRef>
+        </p:style>
+        <p:txBody>
+          <a:bodyPr rtlCol="0" anchor="ctr"/>
+          <a:lstStyle/>
+          <a:p>
+            <a:pPr algn="ctr"/>
+          </a:p>
+        </p:txBody>
+      </p:sp>
+      <p:cxnSp>
+        <p:nvCxnSpPr>
+          <p:cNvPr id="137" name="cl3_k_k_0" descr="Editable line; source id cl3_k_k_0"/>
+          <p:cNvCxnSpPr/>
+          <p:nvPr/>
+        </p:nvCxnSpPr>
+        <p:spPr>
+          <a:xfrm>
+            <a:off x="9215437" y="4762499"/>
+            <a:ext cx="39687" cy="39688"/>
+          </a:xfrm>
+          <a:prstGeom prst="line">
+            <a:avLst/>
+          </a:prstGeom>
+          <a:ln w="23681">
+            <a:solidFill>
+              <a:srgbClr val="111A24"/>
+            </a:solidFill>
+          </a:ln>
+          <a:effectLst/>
+        </p:spPr>
+        <p:style>
+          <a:lnRef idx="2">
+            <a:schemeClr val="accent1"/>
+          </a:lnRef>
+          <a:fillRef idx="0">
+            <a:schemeClr val="accent1"/>
+          </a:fillRef>
+          <a:effectRef idx="0">
+            <a:schemeClr val="accent1"/>
+          </a:effectRef>
+          <a:fontRef idx="minor">
+            <a:schemeClr val="tx1"/>
+          </a:fontRef>
+        </p:style>
+      </p:cxnSp>
+      <p:cxnSp>
+        <p:nvCxnSpPr>
+          <p:cNvPr id="138" name="cl3_k_k_1" descr="Editable line; source id cl3_k_k_1"/>
+          <p:cNvCxnSpPr/>
+          <p:nvPr/>
+        </p:nvCxnSpPr>
+        <p:spPr>
+          <a:xfrm flipV="1">
+            <a:off x="9255124" y="4706937"/>
+            <a:ext cx="79375" cy="95250"/>
+          </a:xfrm>
+          <a:prstGeom prst="line">
+            <a:avLst/>
+          </a:prstGeom>
+          <a:ln w="23681">
+            <a:solidFill>
+              <a:srgbClr val="111A24"/>
+            </a:solidFill>
+          </a:ln>
+          <a:effectLst/>
+        </p:spPr>
+        <p:style>
+          <a:lnRef idx="2">
+            <a:schemeClr val="accent1"/>
+          </a:lnRef>
+          <a:fillRef idx="0">
+            <a:schemeClr val="accent1"/>
+          </a:fillRef>
+          <a:effectRef idx="0">
+            <a:schemeClr val="accent1"/>
+          </a:effectRef>
+          <a:fontRef idx="minor">
+            <a:schemeClr val="tx1"/>
+          </a:fontRef>
+        </p:style>
+      </p:cxnSp>
+      <p:sp>
+        <p:nvSpPr>
+          <p:cNvPr id="139" name="cl3_t" descr="Editable text; source id cl3_t"/>
+          <p:cNvSpPr txBox="1"/>
+          <p:nvPr/>
+        </p:nvSpPr>
+        <p:spPr>
+          <a:xfrm>
+            <a:off x="7905749" y="5032374"/>
             <a:ext cx="2270124" cy="253999"/>
           </a:xfrm>
           <a:prstGeom prst="rect">
@@ -9050,9 +9922,9 @@
               <a:spcAft>
                 <a:spcPts val="0"/>
               </a:spcAft>
-              <a:defRPr sz="1133" b="0" i="0" lang="zh-CN" dirty="0">
+              <a:defRPr sz="1134" b="1" i="0" lang="zh-CN" dirty="0">
                 <a:solidFill>
-                  <a:srgbClr val="3F4854"/>
+                  <a:srgbClr val="27303A"/>
                 </a:solidFill>
                 <a:latin typeface="DejaVu Sans"/>
                 <a:ea typeface="DejaVu Sans"/>
@@ -9060,881 +9932,9 @@
               </a:defRPr>
             </a:pPr>
             <a:r>
-              <a:rPr sz="1133" b="0" i="0" lang="zh-CN" dirty="0">
+              <a:rPr sz="1134" b="1" i="0" lang="zh-CN" dirty="0">
                 <a:solidFill>
-                  <a:srgbClr val="3F4854"/>
-                </a:solidFill>
-                <a:latin typeface="DejaVu Sans"/>
-                <a:ea typeface="DejaVu Sans"/>
-                <a:cs typeface="DejaVu Sans"/>
-              </a:rPr>
-              <a:t>Temperature–time, atmosphere</a:t>
-            </a:r>
-          </a:p>
-        </p:txBody>
-      </p:sp>
-      <p:cxnSp>
-        <p:nvCxnSpPr>
-          <p:cNvPr id="118" name="cl1_s" descr="Editable line; source id cl1_s"/>
-          <p:cNvCxnSpPr/>
-          <p:nvPr/>
-        </p:nvCxnSpPr>
-        <p:spPr>
-          <a:xfrm>
-            <a:off x="2952749" y="4540249"/>
-            <a:ext cx="0" cy="762000"/>
-          </a:xfrm>
-          <a:prstGeom prst="line">
-            <a:avLst/>
-          </a:prstGeom>
-          <a:ln w="9524">
-            <a:solidFill>
-              <a:srgbClr val="E3E8ED"/>
-            </a:solidFill>
-          </a:ln>
-          <a:effectLst/>
-        </p:spPr>
-        <p:style>
-          <a:lnRef idx="2">
-            <a:schemeClr val="accent1"/>
-          </a:lnRef>
-          <a:fillRef idx="0">
-            <a:schemeClr val="accent1"/>
-          </a:fillRef>
-          <a:effectRef idx="0">
-            <a:schemeClr val="accent1"/>
-          </a:effectRef>
-          <a:fontRef idx="minor">
-            <a:schemeClr val="tx1"/>
-          </a:fontRef>
-        </p:style>
-      </p:cxnSp>
-      <p:cxnSp>
-        <p:nvCxnSpPr>
-          <p:cNvPr id="119" name="cl2_g_b_0" descr="Editable line; source id cl2_g_b_0"/>
-          <p:cNvCxnSpPr/>
-          <p:nvPr/>
-        </p:nvCxnSpPr>
-        <p:spPr>
-          <a:xfrm>
-            <a:off x="6262687" y="4683124"/>
-            <a:ext cx="39687" cy="198438"/>
-          </a:xfrm>
-          <a:prstGeom prst="line">
-            <a:avLst/>
-          </a:prstGeom>
-          <a:ln w="7937">
-            <a:solidFill>
-              <a:srgbClr val="1F2937"/>
-            </a:solidFill>
-          </a:ln>
-          <a:effectLst/>
-        </p:spPr>
-        <p:style>
-          <a:lnRef idx="2">
-            <a:schemeClr val="accent1"/>
-          </a:lnRef>
-          <a:fillRef idx="0">
-            <a:schemeClr val="accent1"/>
-          </a:fillRef>
-          <a:effectRef idx="0">
-            <a:schemeClr val="accent1"/>
-          </a:effectRef>
-          <a:fontRef idx="minor">
-            <a:schemeClr val="tx1"/>
-          </a:fontRef>
-        </p:style>
-      </p:cxnSp>
-      <p:cxnSp>
-        <p:nvCxnSpPr>
-          <p:cNvPr id="120" name="cl2_g_b_1" descr="Editable line; source id cl2_g_b_1"/>
-          <p:cNvCxnSpPr/>
-          <p:nvPr/>
-        </p:nvCxnSpPr>
-        <p:spPr>
-          <a:xfrm>
-            <a:off x="6302374" y="4881562"/>
-            <a:ext cx="127000" cy="0"/>
-          </a:xfrm>
-          <a:prstGeom prst="line">
-            <a:avLst/>
-          </a:prstGeom>
-          <a:ln w="7937">
-            <a:solidFill>
-              <a:srgbClr val="1F2937"/>
-            </a:solidFill>
-          </a:ln>
-          <a:effectLst/>
-        </p:spPr>
-        <p:style>
-          <a:lnRef idx="2">
-            <a:schemeClr val="accent1"/>
-          </a:lnRef>
-          <a:fillRef idx="0">
-            <a:schemeClr val="accent1"/>
-          </a:fillRef>
-          <a:effectRef idx="0">
-            <a:schemeClr val="accent1"/>
-          </a:effectRef>
-          <a:fontRef idx="minor">
-            <a:schemeClr val="tx1"/>
-          </a:fontRef>
-        </p:style>
-      </p:cxnSp>
-      <p:cxnSp>
-        <p:nvCxnSpPr>
-          <p:cNvPr id="121" name="cl2_g_b_2" descr="Editable line; source id cl2_g_b_2"/>
-          <p:cNvCxnSpPr/>
-          <p:nvPr/>
-        </p:nvCxnSpPr>
-        <p:spPr>
-          <a:xfrm flipV="1">
-            <a:off x="6429374" y="4683124"/>
-            <a:ext cx="39688" cy="198438"/>
-          </a:xfrm>
-          <a:prstGeom prst="line">
-            <a:avLst/>
-          </a:prstGeom>
-          <a:ln w="7937">
-            <a:solidFill>
-              <a:srgbClr val="1F2937"/>
-            </a:solidFill>
-          </a:ln>
-          <a:effectLst/>
-        </p:spPr>
-        <p:style>
-          <a:lnRef idx="2">
-            <a:schemeClr val="accent1"/>
-          </a:lnRef>
-          <a:fillRef idx="0">
-            <a:schemeClr val="accent1"/>
-          </a:fillRef>
-          <a:effectRef idx="0">
-            <a:schemeClr val="accent1"/>
-          </a:effectRef>
-          <a:fontRef idx="minor">
-            <a:schemeClr val="tx1"/>
-          </a:fontRef>
-        </p:style>
-      </p:cxnSp>
-      <p:cxnSp>
-        <p:nvCxnSpPr>
-          <p:cNvPr id="122" name="cl2_g_r" descr="Editable line; source id cl2_g_r"/>
-          <p:cNvCxnSpPr/>
-          <p:nvPr/>
-        </p:nvCxnSpPr>
-        <p:spPr>
-          <a:xfrm>
-            <a:off x="6238874" y="4683124"/>
-            <a:ext cx="254000" cy="0"/>
-          </a:xfrm>
-          <a:prstGeom prst="line">
-            <a:avLst/>
-          </a:prstGeom>
-          <a:ln w="7937">
-            <a:solidFill>
-              <a:srgbClr val="1F2937"/>
-            </a:solidFill>
-          </a:ln>
-          <a:effectLst/>
-        </p:spPr>
-        <p:style>
-          <a:lnRef idx="2">
-            <a:schemeClr val="accent1"/>
-          </a:lnRef>
-          <a:fillRef idx="0">
-            <a:schemeClr val="accent1"/>
-          </a:fillRef>
-          <a:effectRef idx="0">
-            <a:schemeClr val="accent1"/>
-          </a:effectRef>
-          <a:fontRef idx="minor">
-            <a:schemeClr val="tx1"/>
-          </a:fontRef>
-        </p:style>
-      </p:cxnSp>
-      <p:sp>
-        <p:nvSpPr>
-          <p:cNvPr id="123" name="cl2_k_c" descr="Editable shape; source id cl2_k_c"/>
-          <p:cNvSpPr/>
-          <p:nvPr/>
-        </p:nvSpPr>
-        <p:spPr>
-          <a:xfrm>
-            <a:off x="6730999" y="4643437"/>
-            <a:ext cx="230187" cy="230187"/>
-          </a:xfrm>
-          <a:prstGeom prst="ellipse">
-            <a:avLst/>
-          </a:prstGeom>
-          <a:noFill/>
-          <a:ln w="7937">
-            <a:solidFill>
-              <a:srgbClr val="1F2937"/>
-            </a:solidFill>
-          </a:ln>
-          <a:effectLst/>
-        </p:spPr>
-        <p:style>
-          <a:lnRef idx="1">
-            <a:schemeClr val="accent1"/>
-          </a:lnRef>
-          <a:fillRef idx="3">
-            <a:schemeClr val="accent1"/>
-          </a:fillRef>
-          <a:effectRef idx="0">
-            <a:schemeClr val="accent1"/>
-          </a:effectRef>
-          <a:fontRef idx="minor">
-            <a:schemeClr val="lt1"/>
-          </a:fontRef>
-        </p:style>
-        <p:txBody>
-          <a:bodyPr rtlCol="0" anchor="ctr"/>
-          <a:lstStyle/>
-          <a:p>
-            <a:pPr algn="ctr"/>
-          </a:p>
-        </p:txBody>
-      </p:sp>
-      <p:cxnSp>
-        <p:nvCxnSpPr>
-          <p:cNvPr id="124" name="cl2_k_k_0" descr="Editable line; source id cl2_k_k_0"/>
-          <p:cNvCxnSpPr/>
-          <p:nvPr/>
-        </p:nvCxnSpPr>
-        <p:spPr>
-          <a:xfrm>
-            <a:off x="6786562" y="4762499"/>
-            <a:ext cx="39687" cy="39688"/>
-          </a:xfrm>
-          <a:prstGeom prst="line">
-            <a:avLst/>
-          </a:prstGeom>
-          <a:ln w="10318">
-            <a:solidFill>
-              <a:srgbClr val="1F2937"/>
-            </a:solidFill>
-          </a:ln>
-          <a:effectLst/>
-        </p:spPr>
-        <p:style>
-          <a:lnRef idx="2">
-            <a:schemeClr val="accent1"/>
-          </a:lnRef>
-          <a:fillRef idx="0">
-            <a:schemeClr val="accent1"/>
-          </a:fillRef>
-          <a:effectRef idx="0">
-            <a:schemeClr val="accent1"/>
-          </a:effectRef>
-          <a:fontRef idx="minor">
-            <a:schemeClr val="tx1"/>
-          </a:fontRef>
-        </p:style>
-      </p:cxnSp>
-      <p:cxnSp>
-        <p:nvCxnSpPr>
-          <p:cNvPr id="125" name="cl2_k_k_1" descr="Editable line; source id cl2_k_k_1"/>
-          <p:cNvCxnSpPr/>
-          <p:nvPr/>
-        </p:nvCxnSpPr>
-        <p:spPr>
-          <a:xfrm flipV="1">
-            <a:off x="6826249" y="4706937"/>
-            <a:ext cx="79375" cy="95250"/>
-          </a:xfrm>
-          <a:prstGeom prst="line">
-            <a:avLst/>
-          </a:prstGeom>
-          <a:ln w="10318">
-            <a:solidFill>
-              <a:srgbClr val="1F2937"/>
-            </a:solidFill>
-          </a:ln>
-          <a:effectLst/>
-        </p:spPr>
-        <p:style>
-          <a:lnRef idx="2">
-            <a:schemeClr val="accent1"/>
-          </a:lnRef>
-          <a:fillRef idx="0">
-            <a:schemeClr val="accent1"/>
-          </a:fillRef>
-          <a:effectRef idx="0">
-            <a:schemeClr val="accent1"/>
-          </a:effectRef>
-          <a:fontRef idx="minor">
-            <a:schemeClr val="tx1"/>
-          </a:fontRef>
-        </p:style>
-      </p:cxnSp>
-      <p:sp>
-        <p:nvSpPr>
-          <p:cNvPr id="126" name="cl2_t" descr="Editable text; source id cl2_t"/>
-          <p:cNvSpPr txBox="1"/>
-          <p:nvPr/>
-        </p:nvSpPr>
-        <p:spPr>
-          <a:xfrm>
-            <a:off x="5476874" y="5032374"/>
-            <a:ext cx="2270124" cy="253999"/>
-          </a:xfrm>
-          <a:prstGeom prst="rect">
-            <a:avLst/>
-          </a:prstGeom>
-          <a:noFill/>
-          <a:effectLst/>
-        </p:spPr>
-        <p:txBody>
-          <a:bodyPr wrap="none" anchor="ctr" tIns="0" rIns="0" bIns="0" lIns="0" anchorCtr="0" vertOverflow="overflow">
-            <a:noAutofit/>
-          </a:bodyPr>
-          <a:lstStyle/>
-          <a:p>
-            <a:pPr algn="ctr" fontAlgn="base">
-              <a:lnSpc>
-                <a:spcPts val="1468"/>
-              </a:lnSpc>
-              <a:spcBef>
-                <a:spcPts val="0"/>
-              </a:spcBef>
-              <a:spcAft>
-                <a:spcPts val="0"/>
-              </a:spcAft>
-              <a:defRPr sz="1249" b="0" i="0" lang="zh-CN" dirty="0">
-                <a:solidFill>
-                  <a:srgbClr val="3F4854"/>
-                </a:solidFill>
-                <a:latin typeface="DejaVu Sans"/>
-                <a:ea typeface="DejaVu Sans"/>
-                <a:cs typeface="DejaVu Sans"/>
-              </a:defRPr>
-            </a:pPr>
-            <a:r>
-              <a:rPr sz="1249" b="0" i="0" lang="zh-CN" dirty="0">
-                <a:solidFill>
-                  <a:srgbClr val="3F4854"/>
-                </a:solidFill>
-                <a:latin typeface="DejaVu Sans"/>
-                <a:ea typeface="DejaVu Sans"/>
-                <a:cs typeface="DejaVu Sans"/>
-              </a:rPr>
-              <a:t>Crucible, flux</a:t>
-            </a:r>
-          </a:p>
-        </p:txBody>
-      </p:sp>
-      <p:cxnSp>
-        <p:nvCxnSpPr>
-          <p:cNvPr id="127" name="cl2_s" descr="Editable line; source id cl2_s"/>
-          <p:cNvCxnSpPr/>
-          <p:nvPr/>
-        </p:nvCxnSpPr>
-        <p:spPr>
-          <a:xfrm>
-            <a:off x="5381624" y="4540249"/>
-            <a:ext cx="0" cy="762000"/>
-          </a:xfrm>
-          <a:prstGeom prst="line">
-            <a:avLst/>
-          </a:prstGeom>
-          <a:ln w="9524">
-            <a:solidFill>
-              <a:srgbClr val="E3E8ED"/>
-            </a:solidFill>
-          </a:ln>
-          <a:effectLst/>
-        </p:spPr>
-        <p:style>
-          <a:lnRef idx="2">
-            <a:schemeClr val="accent1"/>
-          </a:lnRef>
-          <a:fillRef idx="0">
-            <a:schemeClr val="accent1"/>
-          </a:fillRef>
-          <a:effectRef idx="0">
-            <a:schemeClr val="accent1"/>
-          </a:effectRef>
-          <a:fontRef idx="minor">
-            <a:schemeClr val="tx1"/>
-          </a:fontRef>
-        </p:style>
-      </p:cxnSp>
-      <p:cxnSp>
-        <p:nvCxnSpPr>
-          <p:cNvPr id="128" name="cl3_g_d_0" descr="Editable line; source id cl3_g_d_0"/>
-          <p:cNvCxnSpPr/>
-          <p:nvPr/>
-        </p:nvCxnSpPr>
-        <p:spPr>
-          <a:xfrm>
-            <a:off x="8794749" y="4611687"/>
-            <a:ext cx="87313" cy="127000"/>
-          </a:xfrm>
-          <a:prstGeom prst="line">
-            <a:avLst/>
-          </a:prstGeom>
-          <a:ln w="7937">
-            <a:solidFill>
-              <a:srgbClr val="1F2937"/>
-            </a:solidFill>
-          </a:ln>
-          <a:effectLst/>
-        </p:spPr>
-        <p:style>
-          <a:lnRef idx="2">
-            <a:schemeClr val="accent1"/>
-          </a:lnRef>
-          <a:fillRef idx="0">
-            <a:schemeClr val="accent1"/>
-          </a:fillRef>
-          <a:effectRef idx="0">
-            <a:schemeClr val="accent1"/>
-          </a:effectRef>
-          <a:fontRef idx="minor">
-            <a:schemeClr val="tx1"/>
-          </a:fontRef>
-        </p:style>
-      </p:cxnSp>
-      <p:cxnSp>
-        <p:nvCxnSpPr>
-          <p:cNvPr id="129" name="cl3_g_d_1" descr="Editable line; source id cl3_g_d_1"/>
-          <p:cNvCxnSpPr/>
-          <p:nvPr/>
-        </p:nvCxnSpPr>
-        <p:spPr>
-          <a:xfrm flipH="1">
-            <a:off x="8842374" y="4738687"/>
-            <a:ext cx="39688" cy="79375"/>
-          </a:xfrm>
-          <a:prstGeom prst="line">
-            <a:avLst/>
-          </a:prstGeom>
-          <a:ln w="7937">
-            <a:solidFill>
-              <a:srgbClr val="1F2937"/>
-            </a:solidFill>
-          </a:ln>
-          <a:effectLst/>
-        </p:spPr>
-        <p:style>
-          <a:lnRef idx="2">
-            <a:schemeClr val="accent1"/>
-          </a:lnRef>
-          <a:fillRef idx="0">
-            <a:schemeClr val="accent1"/>
-          </a:fillRef>
-          <a:effectRef idx="0">
-            <a:schemeClr val="accent1"/>
-          </a:effectRef>
-          <a:fontRef idx="minor">
-            <a:schemeClr val="tx1"/>
-          </a:fontRef>
-        </p:style>
-      </p:cxnSp>
-      <p:cxnSp>
-        <p:nvCxnSpPr>
-          <p:cNvPr id="130" name="cl3_g_d_2" descr="Editable line; source id cl3_g_d_2"/>
-          <p:cNvCxnSpPr/>
-          <p:nvPr/>
-        </p:nvCxnSpPr>
-        <p:spPr>
-          <a:xfrm flipH="1">
-            <a:off x="8747124" y="4818062"/>
-            <a:ext cx="95250" cy="0"/>
-          </a:xfrm>
-          <a:prstGeom prst="line">
-            <a:avLst/>
-          </a:prstGeom>
-          <a:ln w="7937">
-            <a:solidFill>
-              <a:srgbClr val="1F2937"/>
-            </a:solidFill>
-          </a:ln>
-          <a:effectLst/>
-        </p:spPr>
-        <p:style>
-          <a:lnRef idx="2">
-            <a:schemeClr val="accent1"/>
-          </a:lnRef>
-          <a:fillRef idx="0">
-            <a:schemeClr val="accent1"/>
-          </a:fillRef>
-          <a:effectRef idx="0">
-            <a:schemeClr val="accent1"/>
-          </a:effectRef>
-          <a:fontRef idx="minor">
-            <a:schemeClr val="tx1"/>
-          </a:fontRef>
-        </p:style>
-      </p:cxnSp>
-      <p:cxnSp>
-        <p:nvCxnSpPr>
-          <p:cNvPr id="131" name="cl3_g_d_3" descr="Editable line; source id cl3_g_d_3"/>
-          <p:cNvCxnSpPr/>
-          <p:nvPr/>
-        </p:nvCxnSpPr>
-        <p:spPr>
-          <a:xfrm flipH="1" flipV="1">
-            <a:off x="8707437" y="4738687"/>
-            <a:ext cx="39687" cy="79375"/>
-          </a:xfrm>
-          <a:prstGeom prst="line">
-            <a:avLst/>
-          </a:prstGeom>
-          <a:ln w="7937">
-            <a:solidFill>
-              <a:srgbClr val="1F2937"/>
-            </a:solidFill>
-          </a:ln>
-          <a:effectLst/>
-        </p:spPr>
-        <p:style>
-          <a:lnRef idx="2">
-            <a:schemeClr val="accent1"/>
-          </a:lnRef>
-          <a:fillRef idx="0">
-            <a:schemeClr val="accent1"/>
-          </a:fillRef>
-          <a:effectRef idx="0">
-            <a:schemeClr val="accent1"/>
-          </a:effectRef>
-          <a:fontRef idx="minor">
-            <a:schemeClr val="tx1"/>
-          </a:fontRef>
-        </p:style>
-      </p:cxnSp>
-      <p:cxnSp>
-        <p:nvCxnSpPr>
-          <p:cNvPr id="132" name="cl3_g_d_4" descr="Editable line; source id cl3_g_d_4"/>
-          <p:cNvCxnSpPr/>
-          <p:nvPr/>
-        </p:nvCxnSpPr>
-        <p:spPr>
-          <a:xfrm flipV="1">
-            <a:off x="8707437" y="4611687"/>
-            <a:ext cx="87312" cy="127000"/>
-          </a:xfrm>
-          <a:prstGeom prst="line">
-            <a:avLst/>
-          </a:prstGeom>
-          <a:ln w="7937">
-            <a:solidFill>
-              <a:srgbClr val="1F2937"/>
-            </a:solidFill>
-          </a:ln>
-          <a:effectLst/>
-        </p:spPr>
-        <p:style>
-          <a:lnRef idx="2">
-            <a:schemeClr val="accent1"/>
-          </a:lnRef>
-          <a:fillRef idx="0">
-            <a:schemeClr val="accent1"/>
-          </a:fillRef>
-          <a:effectRef idx="0">
-            <a:schemeClr val="accent1"/>
-          </a:effectRef>
-          <a:fontRef idx="minor">
-            <a:schemeClr val="tx1"/>
-          </a:fontRef>
-        </p:style>
-      </p:cxnSp>
-      <p:sp>
-        <p:nvSpPr>
-          <p:cNvPr id="133" name="cl3_g_n0" descr="Editable shape; source id cl3_g_n0"/>
-          <p:cNvSpPr/>
-          <p:nvPr/>
-        </p:nvSpPr>
-        <p:spPr>
-          <a:xfrm>
-            <a:off x="8723312" y="4857749"/>
-            <a:ext cx="47624" cy="47624"/>
-          </a:xfrm>
-          <a:prstGeom prst="ellipse">
-            <a:avLst/>
-          </a:prstGeom>
-          <a:solidFill>
-            <a:srgbClr val="1F2937"/>
-          </a:solidFill>
-          <a:ln>
-            <a:noFill/>
-          </a:ln>
-          <a:effectLst/>
-        </p:spPr>
-        <p:style>
-          <a:lnRef idx="1">
-            <a:schemeClr val="accent1"/>
-          </a:lnRef>
-          <a:fillRef idx="3">
-            <a:schemeClr val="accent1"/>
-          </a:fillRef>
-          <a:effectRef idx="0">
-            <a:schemeClr val="accent1"/>
-          </a:effectRef>
-          <a:fontRef idx="minor">
-            <a:schemeClr val="lt1"/>
-          </a:fontRef>
-        </p:style>
-        <p:txBody>
-          <a:bodyPr rtlCol="0" anchor="ctr"/>
-          <a:lstStyle/>
-          <a:p>
-            <a:pPr algn="ctr"/>
-          </a:p>
-        </p:txBody>
-      </p:sp>
-      <p:sp>
-        <p:nvSpPr>
-          <p:cNvPr id="134" name="cl3_g_n1" descr="Editable shape; source id cl3_g_n1"/>
-          <p:cNvSpPr/>
-          <p:nvPr/>
-        </p:nvSpPr>
-        <p:spPr>
-          <a:xfrm>
-            <a:off x="8786812" y="4873624"/>
-            <a:ext cx="47624" cy="47624"/>
-          </a:xfrm>
-          <a:prstGeom prst="ellipse">
-            <a:avLst/>
-          </a:prstGeom>
-          <a:solidFill>
-            <a:srgbClr val="1F2937"/>
-          </a:solidFill>
-          <a:ln>
-            <a:noFill/>
-          </a:ln>
-          <a:effectLst/>
-        </p:spPr>
-        <p:style>
-          <a:lnRef idx="1">
-            <a:schemeClr val="accent1"/>
-          </a:lnRef>
-          <a:fillRef idx="3">
-            <a:schemeClr val="accent1"/>
-          </a:fillRef>
-          <a:effectRef idx="0">
-            <a:schemeClr val="accent1"/>
-          </a:effectRef>
-          <a:fontRef idx="minor">
-            <a:schemeClr val="lt1"/>
-          </a:fontRef>
-        </p:style>
-        <p:txBody>
-          <a:bodyPr rtlCol="0" anchor="ctr"/>
-          <a:lstStyle/>
-          <a:p>
-            <a:pPr algn="ctr"/>
-          </a:p>
-        </p:txBody>
-      </p:sp>
-      <p:sp>
-        <p:nvSpPr>
-          <p:cNvPr id="135" name="cl3_g_n2" descr="Editable shape; source id cl3_g_n2"/>
-          <p:cNvSpPr/>
-          <p:nvPr/>
-        </p:nvSpPr>
-        <p:spPr>
-          <a:xfrm>
-            <a:off x="8842374" y="4841874"/>
-            <a:ext cx="47624" cy="47624"/>
-          </a:xfrm>
-          <a:prstGeom prst="ellipse">
-            <a:avLst/>
-          </a:prstGeom>
-          <a:solidFill>
-            <a:srgbClr val="1F2937"/>
-          </a:solidFill>
-          <a:ln>
-            <a:noFill/>
-          </a:ln>
-          <a:effectLst/>
-        </p:spPr>
-        <p:style>
-          <a:lnRef idx="1">
-            <a:schemeClr val="accent1"/>
-          </a:lnRef>
-          <a:fillRef idx="3">
-            <a:schemeClr val="accent1"/>
-          </a:fillRef>
-          <a:effectRef idx="0">
-            <a:schemeClr val="accent1"/>
-          </a:effectRef>
-          <a:fontRef idx="minor">
-            <a:schemeClr val="lt1"/>
-          </a:fontRef>
-        </p:style>
-        <p:txBody>
-          <a:bodyPr rtlCol="0" anchor="ctr"/>
-          <a:lstStyle/>
-          <a:p>
-            <a:pPr algn="ctr"/>
-          </a:p>
-        </p:txBody>
-      </p:sp>
-      <p:sp>
-        <p:nvSpPr>
-          <p:cNvPr id="136" name="cl3_k_c" descr="Editable shape; source id cl3_k_c"/>
-          <p:cNvSpPr/>
-          <p:nvPr/>
-        </p:nvSpPr>
-        <p:spPr>
-          <a:xfrm>
-            <a:off x="9159874" y="4643437"/>
-            <a:ext cx="230187" cy="230187"/>
-          </a:xfrm>
-          <a:prstGeom prst="ellipse">
-            <a:avLst/>
-          </a:prstGeom>
-          <a:noFill/>
-          <a:ln w="7937">
-            <a:solidFill>
-              <a:srgbClr val="1F2937"/>
-            </a:solidFill>
-          </a:ln>
-          <a:effectLst/>
-        </p:spPr>
-        <p:style>
-          <a:lnRef idx="1">
-            <a:schemeClr val="accent1"/>
-          </a:lnRef>
-          <a:fillRef idx="3">
-            <a:schemeClr val="accent1"/>
-          </a:fillRef>
-          <a:effectRef idx="0">
-            <a:schemeClr val="accent1"/>
-          </a:effectRef>
-          <a:fontRef idx="minor">
-            <a:schemeClr val="lt1"/>
-          </a:fontRef>
-        </p:style>
-        <p:txBody>
-          <a:bodyPr rtlCol="0" anchor="ctr"/>
-          <a:lstStyle/>
-          <a:p>
-            <a:pPr algn="ctr"/>
-          </a:p>
-        </p:txBody>
-      </p:sp>
-      <p:cxnSp>
-        <p:nvCxnSpPr>
-          <p:cNvPr id="137" name="cl3_k_k_0" descr="Editable line; source id cl3_k_k_0"/>
-          <p:cNvCxnSpPr/>
-          <p:nvPr/>
-        </p:nvCxnSpPr>
-        <p:spPr>
-          <a:xfrm>
-            <a:off x="9215437" y="4762499"/>
-            <a:ext cx="39687" cy="39688"/>
-          </a:xfrm>
-          <a:prstGeom prst="line">
-            <a:avLst/>
-          </a:prstGeom>
-          <a:ln w="10318">
-            <a:solidFill>
-              <a:srgbClr val="1F2937"/>
-            </a:solidFill>
-          </a:ln>
-          <a:effectLst/>
-        </p:spPr>
-        <p:style>
-          <a:lnRef idx="2">
-            <a:schemeClr val="accent1"/>
-          </a:lnRef>
-          <a:fillRef idx="0">
-            <a:schemeClr val="accent1"/>
-          </a:fillRef>
-          <a:effectRef idx="0">
-            <a:schemeClr val="accent1"/>
-          </a:effectRef>
-          <a:fontRef idx="minor">
-            <a:schemeClr val="tx1"/>
-          </a:fontRef>
-        </p:style>
-      </p:cxnSp>
-      <p:cxnSp>
-        <p:nvCxnSpPr>
-          <p:cNvPr id="138" name="cl3_k_k_1" descr="Editable line; source id cl3_k_k_1"/>
-          <p:cNvCxnSpPr/>
-          <p:nvPr/>
-        </p:nvCxnSpPr>
-        <p:spPr>
-          <a:xfrm flipV="1">
-            <a:off x="9255124" y="4706937"/>
-            <a:ext cx="79375" cy="95250"/>
-          </a:xfrm>
-          <a:prstGeom prst="line">
-            <a:avLst/>
-          </a:prstGeom>
-          <a:ln w="10318">
-            <a:solidFill>
-              <a:srgbClr val="1F2937"/>
-            </a:solidFill>
-          </a:ln>
-          <a:effectLst/>
-        </p:spPr>
-        <p:style>
-          <a:lnRef idx="2">
-            <a:schemeClr val="accent1"/>
-          </a:lnRef>
-          <a:fillRef idx="0">
-            <a:schemeClr val="accent1"/>
-          </a:fillRef>
-          <a:effectRef idx="0">
-            <a:schemeClr val="accent1"/>
-          </a:effectRef>
-          <a:fontRef idx="minor">
-            <a:schemeClr val="tx1"/>
-          </a:fontRef>
-        </p:style>
-      </p:cxnSp>
-      <p:sp>
-        <p:nvSpPr>
-          <p:cNvPr id="139" name="cl3_t" descr="Editable text; source id cl3_t"/>
-          <p:cNvSpPr txBox="1"/>
-          <p:nvPr/>
-        </p:nvSpPr>
-        <p:spPr>
-          <a:xfrm>
-            <a:off x="7905749" y="5032374"/>
-            <a:ext cx="2270124" cy="253999"/>
-          </a:xfrm>
-          <a:prstGeom prst="rect">
-            <a:avLst/>
-          </a:prstGeom>
-          <a:noFill/>
-          <a:effectLst/>
-        </p:spPr>
-        <p:txBody>
-          <a:bodyPr wrap="none" anchor="ctr" tIns="0" rIns="0" bIns="0" lIns="0" anchorCtr="0" vertOverflow="overflow">
-            <a:noAutofit/>
-          </a:bodyPr>
-          <a:lstStyle/>
-          <a:p>
-            <a:pPr algn="ctr" fontAlgn="base">
-              <a:lnSpc>
-                <a:spcPts val="1468"/>
-              </a:lnSpc>
-              <a:spcBef>
-                <a:spcPts val="0"/>
-              </a:spcBef>
-              <a:spcAft>
-                <a:spcPts val="0"/>
-              </a:spcAft>
-              <a:defRPr sz="1249" b="0" i="0" lang="zh-CN" dirty="0">
-                <a:solidFill>
-                  <a:srgbClr val="3F4854"/>
-                </a:solidFill>
-                <a:latin typeface="DejaVu Sans"/>
-                <a:ea typeface="DejaVu Sans"/>
-                <a:cs typeface="DejaVu Sans"/>
-              </a:defRPr>
-            </a:pPr>
-            <a:r>
-              <a:rPr sz="1249" b="0" i="0" lang="zh-CN" dirty="0">
-                <a:solidFill>
-                  <a:srgbClr val="3F4854"/>
+                  <a:srgbClr val="27303A"/>
                 </a:solidFill>
                 <a:latin typeface="DejaVu Sans"/>
                 <a:ea typeface="DejaVu Sans"/>
@@ -10000,7 +10000,7 @@
           <a:solidFill>
             <a:srgbClr val="FFF6E3"/>
           </a:solidFill>
-          <a:ln w="8731">
+          <a:ln w="12699">
             <a:solidFill>
               <a:srgbClr val="C48A24"/>
             </a:solidFill>
@@ -10062,7 +10062,7 @@
               <a:spcAft>
                 <a:spcPts val="0"/>
               </a:spcAft>
-              <a:defRPr sz="1187" b="0" i="0" lang="zh-CN" dirty="0">
+              <a:defRPr sz="1185" b="1" i="0" lang="zh-CN" dirty="0">
                 <a:solidFill>
                   <a:srgbClr val="7A5410"/>
                 </a:solidFill>
@@ -10072,7 +10072,7 @@
               </a:defRPr>
             </a:pPr>
             <a:r>
-              <a:rPr sz="1187" b="0" i="0" lang="zh-CN" dirty="0">
+              <a:rPr sz="1185" b="1" i="0" lang="zh-CN" dirty="0">
                 <a:solidFill>
                   <a:srgbClr val="7A5410"/>
                 </a:solidFill>
@@ -10104,7 +10104,7 @@
           <a:solidFill>
             <a:srgbClr val="FFFFFF"/>
           </a:solidFill>
-          <a:ln w="11112">
+          <a:ln w="15081">
             <a:solidFill>
               <a:srgbClr val="1F7F8C"/>
             </a:solidFill>
@@ -10249,9 +10249,9 @@
           <a:prstGeom prst="line">
             <a:avLst/>
           </a:prstGeom>
-          <a:ln w="8572">
+          <a:ln w="18216">
             <a:solidFill>
-              <a:srgbClr val="1F2937"/>
+              <a:srgbClr val="111A24"/>
             </a:solidFill>
           </a:ln>
           <a:effectLst/>
@@ -10285,9 +10285,9 @@
           <a:prstGeom prst="line">
             <a:avLst/>
           </a:prstGeom>
-          <a:ln w="8572">
+          <a:ln w="18216">
             <a:solidFill>
-              <a:srgbClr val="1F2937"/>
+              <a:srgbClr val="111A24"/>
             </a:solidFill>
           </a:ln>
           <a:effectLst/>
@@ -10321,9 +10321,9 @@
           <a:prstGeom prst="line">
             <a:avLst/>
           </a:prstGeom>
-          <a:ln w="8572">
+          <a:ln w="18216">
             <a:solidFill>
-              <a:srgbClr val="1F2937"/>
+              <a:srgbClr val="111A24"/>
             </a:solidFill>
           </a:ln>
           <a:effectLst/>
@@ -10357,9 +10357,9 @@
           <a:prstGeom prst="line">
             <a:avLst/>
           </a:prstGeom>
-          <a:ln w="8572">
+          <a:ln w="18216">
             <a:solidFill>
-              <a:srgbClr val="1F2937"/>
+              <a:srgbClr val="111A24"/>
             </a:solidFill>
           </a:ln>
           <a:effectLst/>
@@ -10393,9 +10393,9 @@
           <a:prstGeom prst="line">
             <a:avLst/>
           </a:prstGeom>
-          <a:ln w="8572">
+          <a:ln w="18216">
             <a:solidFill>
-              <a:srgbClr val="1F2937"/>
+              <a:srgbClr val="111A24"/>
             </a:solidFill>
           </a:ln>
           <a:effectLst/>
@@ -10429,9 +10429,9 @@
           <a:prstGeom prst="line">
             <a:avLst/>
           </a:prstGeom>
-          <a:ln w="8572">
+          <a:ln w="18216">
             <a:solidFill>
-              <a:srgbClr val="1F2937"/>
+              <a:srgbClr val="111A24"/>
             </a:solidFill>
           </a:ln>
           <a:effectLst/>
@@ -10642,7 +10642,7 @@
             <a:avLst/>
           </a:prstGeom>
           <a:solidFill>
-            <a:srgbClr val="1F2937"/>
+            <a:srgbClr val="111A24"/>
           </a:solidFill>
           <a:ln>
             <a:noFill/>
@@ -10864,11 +10864,11 @@
             </a:avLst>
           </a:prstGeom>
           <a:solidFill>
-            <a:srgbClr val="F7F9FB"/>
+            <a:srgbClr val="F4F7FA"/>
           </a:solidFill>
-          <a:ln w="9524">
+          <a:ln w="12699">
             <a:solidFill>
-              <a:srgbClr val="CBD3DA"/>
+              <a:srgbClr val="AEBBC7"/>
             </a:solidFill>
           </a:ln>
           <a:effectLst/>
@@ -10920,7 +10920,7 @@
           <a:p>
             <a:pPr algn="ctr" fontAlgn="base">
               <a:lnSpc>
-                <a:spcPts val="1156"/>
+                <a:spcPts val="1031"/>
               </a:lnSpc>
               <a:spcBef>
                 <a:spcPts val="0"/>
@@ -10928,9 +10928,9 @@
               <a:spcAft>
                 <a:spcPts val="0"/>
               </a:spcAft>
-              <a:defRPr sz="980" b="0" i="0" lang="zh-CN" dirty="0">
+              <a:defRPr sz="865" b="1" i="0" lang="zh-CN" dirty="0">
                 <a:solidFill>
-                  <a:srgbClr val="3F4854"/>
+                  <a:srgbClr val="27303A"/>
                 </a:solidFill>
                 <a:latin typeface="DejaVu Sans"/>
                 <a:ea typeface="DejaVu Sans"/>
@@ -10938,9 +10938,9 @@
               </a:defRPr>
             </a:pPr>
             <a:r>
-              <a:rPr sz="980" b="0" i="0" lang="zh-CN" dirty="0">
+              <a:rPr sz="865" b="1" i="0" lang="zh-CN" dirty="0">
                 <a:solidFill>
-                  <a:srgbClr val="3F4854"/>
+                  <a:srgbClr val="27303A"/>
                 </a:solidFill>
                 <a:latin typeface="DejaVu Sans"/>
                 <a:ea typeface="DejaVu Sans"/>
@@ -10970,7 +10970,7 @@
           <a:solidFill>
             <a:srgbClr val="FFFFFF"/>
           </a:solidFill>
-          <a:ln w="11112">
+          <a:ln w="15081">
             <a:solidFill>
               <a:srgbClr val="1F7F8C"/>
             </a:solidFill>
@@ -11115,9 +11115,9 @@
           <a:prstGeom prst="line">
             <a:avLst/>
           </a:prstGeom>
-          <a:ln w="8572">
+          <a:ln w="18216">
             <a:solidFill>
-              <a:srgbClr val="1F2937"/>
+              <a:srgbClr val="111A24"/>
             </a:solidFill>
           </a:ln>
           <a:effectLst/>
@@ -11151,9 +11151,9 @@
           <a:prstGeom prst="line">
             <a:avLst/>
           </a:prstGeom>
-          <a:ln w="8572">
+          <a:ln w="18216">
             <a:solidFill>
-              <a:srgbClr val="1F2937"/>
+              <a:srgbClr val="111A24"/>
             </a:solidFill>
           </a:ln>
           <a:effectLst/>
@@ -11187,9 +11187,9 @@
           <a:prstGeom prst="line">
             <a:avLst/>
           </a:prstGeom>
-          <a:ln w="8572">
+          <a:ln w="18216">
             <a:solidFill>
-              <a:srgbClr val="1F2937"/>
+              <a:srgbClr val="111A24"/>
             </a:solidFill>
           </a:ln>
           <a:effectLst/>
@@ -11223,9 +11223,9 @@
           <a:prstGeom prst="line">
             <a:avLst/>
           </a:prstGeom>
-          <a:ln w="8572">
+          <a:ln w="18216">
             <a:solidFill>
-              <a:srgbClr val="1F2937"/>
+              <a:srgbClr val="111A24"/>
             </a:solidFill>
           </a:ln>
           <a:effectLst/>
@@ -11259,9 +11259,9 @@
           <a:prstGeom prst="line">
             <a:avLst/>
           </a:prstGeom>
-          <a:ln w="8572">
+          <a:ln w="18216">
             <a:solidFill>
-              <a:srgbClr val="1F2937"/>
+              <a:srgbClr val="111A24"/>
             </a:solidFill>
           </a:ln>
           <a:effectLst/>
@@ -11295,9 +11295,9 @@
           <a:prstGeom prst="line">
             <a:avLst/>
           </a:prstGeom>
-          <a:ln w="8572">
+          <a:ln w="18216">
             <a:solidFill>
-              <a:srgbClr val="1F2937"/>
+              <a:srgbClr val="111A24"/>
             </a:solidFill>
           </a:ln>
           <a:effectLst/>
@@ -11331,9 +11331,9 @@
           <a:prstGeom prst="line">
             <a:avLst/>
           </a:prstGeom>
-          <a:ln w="8572">
+          <a:ln w="18216">
             <a:solidFill>
-              <a:srgbClr val="1F2937"/>
+              <a:srgbClr val="111A24"/>
             </a:solidFill>
           </a:ln>
           <a:effectLst/>
@@ -11367,9 +11367,9 @@
           <a:prstGeom prst="line">
             <a:avLst/>
           </a:prstGeom>
-          <a:ln w="8572">
+          <a:ln w="18216">
             <a:solidFill>
-              <a:srgbClr val="1F2937"/>
+              <a:srgbClr val="111A24"/>
             </a:solidFill>
           </a:ln>
           <a:effectLst/>
@@ -11403,9 +11403,9 @@
           <a:prstGeom prst="line">
             <a:avLst/>
           </a:prstGeom>
-          <a:ln w="8572">
+          <a:ln w="18216">
             <a:solidFill>
-              <a:srgbClr val="1F2937"/>
+              <a:srgbClr val="111A24"/>
             </a:solidFill>
           </a:ln>
           <a:effectLst/>
@@ -11439,9 +11439,9 @@
           <a:prstGeom prst="line">
             <a:avLst/>
           </a:prstGeom>
-          <a:ln w="8572">
+          <a:ln w="18216">
             <a:solidFill>
-              <a:srgbClr val="1F2937"/>
+              <a:srgbClr val="111A24"/>
             </a:solidFill>
           </a:ln>
           <a:effectLst/>
@@ -11478,11 +11478,11 @@
             </a:avLst>
           </a:prstGeom>
           <a:solidFill>
-            <a:srgbClr val="F7F9FB"/>
+            <a:srgbClr val="F4F7FA"/>
           </a:solidFill>
-          <a:ln w="9524">
+          <a:ln w="12699">
             <a:solidFill>
-              <a:srgbClr val="CBD3DA"/>
+              <a:srgbClr val="AEBBC7"/>
             </a:solidFill>
           </a:ln>
           <a:effectLst/>
@@ -11534,7 +11534,7 @@
           <a:p>
             <a:pPr algn="ctr" fontAlgn="base">
               <a:lnSpc>
-                <a:spcPts val="1359"/>
+                <a:spcPts val="1203"/>
               </a:lnSpc>
               <a:spcBef>
                 <a:spcPts val="0"/>
@@ -11542,9 +11542,9 @@
               <a:spcAft>
                 <a:spcPts val="0"/>
               </a:spcAft>
-              <a:defRPr sz="1148" b="0" i="0" lang="zh-CN" dirty="0">
+              <a:defRPr sz="1012" b="1" i="0" lang="zh-CN" dirty="0">
                 <a:solidFill>
-                  <a:srgbClr val="3F4854"/>
+                  <a:srgbClr val="27303A"/>
                 </a:solidFill>
                 <a:latin typeface="DejaVu Sans"/>
                 <a:ea typeface="DejaVu Sans"/>
@@ -11552,9 +11552,9 @@
               </a:defRPr>
             </a:pPr>
             <a:r>
-              <a:rPr sz="1148" b="0" i="0" lang="zh-CN" dirty="0">
+              <a:rPr sz="1012" b="1" i="0" lang="zh-CN" dirty="0">
                 <a:solidFill>
-                  <a:srgbClr val="3F4854"/>
+                  <a:srgbClr val="27303A"/>
                 </a:solidFill>
                 <a:latin typeface="DejaVu Sans"/>
                 <a:ea typeface="DejaVu Sans"/>
@@ -11584,7 +11584,7 @@
           <a:solidFill>
             <a:srgbClr val="FFFFFF"/>
           </a:solidFill>
-          <a:ln w="11112">
+          <a:ln w="15081">
             <a:solidFill>
               <a:srgbClr val="1F7F8C"/>
             </a:solidFill>
@@ -11730,7 +11730,7 @@
             <a:avLst/>
           </a:prstGeom>
           <a:solidFill>
-            <a:srgbClr val="1F2937"/>
+            <a:srgbClr val="111A24"/>
           </a:solidFill>
           <a:ln>
             <a:noFill/>
@@ -11774,7 +11774,7 @@
             <a:avLst/>
           </a:prstGeom>
           <a:solidFill>
-            <a:srgbClr val="1F2937"/>
+            <a:srgbClr val="111A24"/>
           </a:solidFill>
           <a:ln>
             <a:noFill/>
@@ -11818,7 +11818,7 @@
             <a:avLst/>
           </a:prstGeom>
           <a:solidFill>
-            <a:srgbClr val="1F2937"/>
+            <a:srgbClr val="111A24"/>
           </a:solidFill>
           <a:ln>
             <a:noFill/>
@@ -11864,11 +11864,11 @@
             </a:avLst>
           </a:prstGeom>
           <a:solidFill>
-            <a:srgbClr val="F7F9FB"/>
+            <a:srgbClr val="F4F7FA"/>
           </a:solidFill>
-          <a:ln w="9524">
+          <a:ln w="12699">
             <a:solidFill>
-              <a:srgbClr val="CBD3DA"/>
+              <a:srgbClr val="AEBBC7"/>
             </a:solidFill>
           </a:ln>
           <a:effectLst/>
@@ -11928,9 +11928,9 @@
               <a:spcAft>
                 <a:spcPts val="0"/>
               </a:spcAft>
-              <a:defRPr sz="1187" b="0" i="0" lang="zh-CN" dirty="0">
+              <a:defRPr sz="1187" b="1" i="0" lang="zh-CN" dirty="0">
                 <a:solidFill>
-                  <a:srgbClr val="3F4854"/>
+                  <a:srgbClr val="27303A"/>
                 </a:solidFill>
                 <a:latin typeface="DejaVu Sans"/>
                 <a:ea typeface="DejaVu Sans"/>
@@ -11938,9 +11938,9 @@
               </a:defRPr>
             </a:pPr>
             <a:r>
-              <a:rPr sz="1187" b="0" i="0" lang="zh-CN" dirty="0">
+              <a:rPr sz="1187" b="1" i="0" lang="zh-CN" dirty="0">
                 <a:solidFill>
-                  <a:srgbClr val="3F4854"/>
+                  <a:srgbClr val="27303A"/>
                 </a:solidFill>
                 <a:latin typeface="DejaVu Sans"/>
                 <a:ea typeface="DejaVu Sans"/>
@@ -11970,7 +11970,7 @@
           <a:solidFill>
             <a:srgbClr val="FFFFFF"/>
           </a:solidFill>
-          <a:ln w="11112">
+          <a:ln w="15081">
             <a:solidFill>
               <a:srgbClr val="1F7F8C"/>
             </a:solidFill>
@@ -12118,9 +12118,9 @@
             </a:avLst>
           </a:prstGeom>
           <a:noFill/>
-          <a:ln w="8572">
+          <a:ln w="18216">
             <a:solidFill>
-              <a:srgbClr val="1F2937"/>
+              <a:srgbClr val="111A24"/>
             </a:solidFill>
           </a:ln>
           <a:effectLst/>
@@ -12162,9 +12162,9 @@
             <a:avLst/>
           </a:prstGeom>
           <a:noFill/>
-          <a:ln w="8572">
+          <a:ln w="18216">
             <a:solidFill>
-              <a:srgbClr val="1F2937"/>
+              <a:srgbClr val="111A24"/>
             </a:solidFill>
           </a:ln>
           <a:effectLst/>
@@ -12205,9 +12205,9 @@
           <a:prstGeom prst="line">
             <a:avLst/>
           </a:prstGeom>
-          <a:ln w="8572">
+          <a:ln w="18216">
             <a:solidFill>
-              <a:srgbClr val="1F2937"/>
+              <a:srgbClr val="111A24"/>
             </a:solidFill>
           </a:ln>
           <a:effectLst/>
@@ -12241,9 +12241,9 @@
           <a:prstGeom prst="line">
             <a:avLst/>
           </a:prstGeom>
-          <a:ln w="8572">
+          <a:ln w="18216">
             <a:solidFill>
-              <a:srgbClr val="1F2937"/>
+              <a:srgbClr val="111A24"/>
             </a:solidFill>
           </a:ln>
           <a:effectLst/>
@@ -12277,9 +12277,9 @@
           <a:prstGeom prst="line">
             <a:avLst/>
           </a:prstGeom>
-          <a:ln w="8572">
+          <a:ln w="18216">
             <a:solidFill>
-              <a:srgbClr val="1F2937"/>
+              <a:srgbClr val="111A24"/>
             </a:solidFill>
           </a:ln>
           <a:effectLst/>
@@ -12316,11 +12316,11 @@
             </a:avLst>
           </a:prstGeom>
           <a:solidFill>
-            <a:srgbClr val="F7F9FB"/>
+            <a:srgbClr val="F4F7FA"/>
           </a:solidFill>
-          <a:ln w="9524">
+          <a:ln w="12699">
             <a:solidFill>
-              <a:srgbClr val="CBD3DA"/>
+              <a:srgbClr val="AEBBC7"/>
             </a:solidFill>
           </a:ln>
           <a:effectLst/>
@@ -12380,9 +12380,9 @@
               <a:spcAft>
                 <a:spcPts val="0"/>
               </a:spcAft>
-              <a:defRPr sz="1187" b="0" i="0" lang="zh-CN" dirty="0">
+              <a:defRPr sz="1187" b="1" i="0" lang="zh-CN" dirty="0">
                 <a:solidFill>
-                  <a:srgbClr val="3F4854"/>
+                  <a:srgbClr val="27303A"/>
                 </a:solidFill>
                 <a:latin typeface="DejaVu Sans"/>
                 <a:ea typeface="DejaVu Sans"/>
@@ -12390,9 +12390,9 @@
               </a:defRPr>
             </a:pPr>
             <a:r>
-              <a:rPr sz="1187" b="0" i="0" lang="zh-CN" dirty="0">
+              <a:rPr sz="1187" b="1" i="0" lang="zh-CN" dirty="0">
                 <a:solidFill>
-                  <a:srgbClr val="3F4854"/>
+                  <a:srgbClr val="27303A"/>
                 </a:solidFill>
                 <a:latin typeface="DejaVu Sans"/>
                 <a:ea typeface="DejaVu Sans"/>
@@ -12411,8 +12411,8 @@
         </p:nvSpPr>
         <p:spPr>
           <a:xfrm>
-            <a:off x="1460500" y="3206750"/>
-            <a:ext cx="79375" cy="349250"/>
+            <a:off x="1452562" y="3206750"/>
+            <a:ext cx="95250" cy="349250"/>
           </a:xfrm>
           <a:custGeom>
             <a:avLst/>
@@ -12421,34 +12421,34 @@
             <a:cxnLst/>
             <a:rect l="l" t="t" r="r" b="b"/>
             <a:pathLst>
-              <a:path w="10000" h="44000">
+              <a:path w="12000" h="44000">
                 <a:moveTo>
-                  <a:pt x="5900" y="0"/>
+                  <a:pt x="7250" y="0"/>
                 </a:moveTo>
                 <a:lnTo>
-                  <a:pt x="5900" y="32000"/>
+                  <a:pt x="7250" y="29000"/>
                 </a:lnTo>
                 <a:lnTo>
-                  <a:pt x="10000" y="32000"/>
+                  <a:pt x="12000" y="29000"/>
                 </a:lnTo>
                 <a:lnTo>
-                  <a:pt x="5000" y="44000"/>
+                  <a:pt x="6000" y="44000"/>
                 </a:lnTo>
                 <a:lnTo>
-                  <a:pt x="0" y="32000"/>
+                  <a:pt x="0" y="29000"/>
                 </a:lnTo>
                 <a:lnTo>
-                  <a:pt x="4100" y="32000"/>
+                  <a:pt x="4750" y="29000"/>
                 </a:lnTo>
                 <a:lnTo>
-                  <a:pt x="4100" y="0"/>
+                  <a:pt x="4750" y="0"/>
                 </a:lnTo>
                 <a:close/>
               </a:path>
             </a:pathLst>
           </a:custGeom>
           <a:solidFill>
-            <a:srgbClr val="4B5563"/>
+            <a:srgbClr val="3C4753"/>
           </a:solidFill>
           <a:ln>
             <a:noFill/>
@@ -12496,7 +12496,7 @@
           <a:solidFill>
             <a:srgbClr val="FFFFFF"/>
           </a:solidFill>
-          <a:ln w="8731">
+          <a:ln w="12699">
             <a:solidFill>
               <a:srgbClr val="CBD3DA"/>
             </a:solidFill>
@@ -12558,9 +12558,9 @@
               <a:spcAft>
                 <a:spcPts val="0"/>
               </a:spcAft>
-              <a:defRPr sz="999" b="0" i="0" lang="zh-CN" dirty="0">
+              <a:defRPr sz="999" b="1" i="0" lang="zh-CN" dirty="0">
                 <a:solidFill>
-                  <a:srgbClr val="3F4854"/>
+                  <a:srgbClr val="27303A"/>
                 </a:solidFill>
                 <a:latin typeface="DejaVu Sans"/>
                 <a:ea typeface="DejaVu Sans"/>
@@ -12568,9 +12568,9 @@
               </a:defRPr>
             </a:pPr>
             <a:r>
-              <a:rPr sz="999" b="0" i="0" lang="zh-CN" dirty="0">
+              <a:rPr sz="999" b="1" i="0" lang="zh-CN" dirty="0">
                 <a:solidFill>
-                  <a:srgbClr val="3F4854"/>
+                  <a:srgbClr val="27303A"/>
                 </a:solidFill>
                 <a:latin typeface="DejaVu Sans"/>
                 <a:ea typeface="DejaVu Sans"/>
@@ -12589,8 +12589,8 @@
         </p:nvSpPr>
         <p:spPr>
           <a:xfrm>
-            <a:off x="3746500" y="3206750"/>
-            <a:ext cx="79375" cy="349250"/>
+            <a:off x="3738562" y="3206750"/>
+            <a:ext cx="95250" cy="349250"/>
           </a:xfrm>
           <a:custGeom>
             <a:avLst/>
@@ -12599,34 +12599,34 @@
             <a:cxnLst/>
             <a:rect l="l" t="t" r="r" b="b"/>
             <a:pathLst>
-              <a:path w="10000" h="44000">
+              <a:path w="12000" h="44000">
                 <a:moveTo>
-                  <a:pt x="5900" y="0"/>
+                  <a:pt x="7250" y="0"/>
                 </a:moveTo>
                 <a:lnTo>
-                  <a:pt x="5900" y="32000"/>
+                  <a:pt x="7250" y="29000"/>
                 </a:lnTo>
                 <a:lnTo>
-                  <a:pt x="10000" y="32000"/>
+                  <a:pt x="12000" y="29000"/>
                 </a:lnTo>
                 <a:lnTo>
-                  <a:pt x="5000" y="44000"/>
+                  <a:pt x="6000" y="44000"/>
                 </a:lnTo>
                 <a:lnTo>
-                  <a:pt x="0" y="32000"/>
+                  <a:pt x="0" y="29000"/>
                 </a:lnTo>
                 <a:lnTo>
-                  <a:pt x="4100" y="32000"/>
+                  <a:pt x="4750" y="29000"/>
                 </a:lnTo>
                 <a:lnTo>
-                  <a:pt x="4100" y="0"/>
+                  <a:pt x="4750" y="0"/>
                 </a:lnTo>
                 <a:close/>
               </a:path>
             </a:pathLst>
           </a:custGeom>
           <a:solidFill>
-            <a:srgbClr val="4B5563"/>
+            <a:srgbClr val="3C4753"/>
           </a:solidFill>
           <a:ln>
             <a:noFill/>
@@ -12674,7 +12674,7 @@
           <a:solidFill>
             <a:srgbClr val="FFFFFF"/>
           </a:solidFill>
-          <a:ln w="8731">
+          <a:ln w="12699">
             <a:solidFill>
               <a:srgbClr val="CBD3DA"/>
             </a:solidFill>
@@ -12736,9 +12736,9 @@
               <a:spcAft>
                 <a:spcPts val="0"/>
               </a:spcAft>
-              <a:defRPr sz="999" b="0" i="0" lang="zh-CN" dirty="0">
+              <a:defRPr sz="999" b="1" i="0" lang="zh-CN" dirty="0">
                 <a:solidFill>
-                  <a:srgbClr val="3F4854"/>
+                  <a:srgbClr val="27303A"/>
                 </a:solidFill>
                 <a:latin typeface="DejaVu Sans"/>
                 <a:ea typeface="DejaVu Sans"/>
@@ -12746,9 +12746,9 @@
               </a:defRPr>
             </a:pPr>
             <a:r>
-              <a:rPr sz="999" b="0" i="0" lang="zh-CN" dirty="0">
+              <a:rPr sz="999" b="1" i="0" lang="zh-CN" dirty="0">
                 <a:solidFill>
-                  <a:srgbClr val="3F4854"/>
+                  <a:srgbClr val="27303A"/>
                 </a:solidFill>
                 <a:latin typeface="DejaVu Sans"/>
                 <a:ea typeface="DejaVu Sans"/>
@@ -12767,8 +12767,8 @@
         </p:nvSpPr>
         <p:spPr>
           <a:xfrm>
-            <a:off x="6032500" y="3206750"/>
-            <a:ext cx="79375" cy="349250"/>
+            <a:off x="6024562" y="3206750"/>
+            <a:ext cx="95250" cy="349250"/>
           </a:xfrm>
           <a:custGeom>
             <a:avLst/>
@@ -12777,34 +12777,34 @@
             <a:cxnLst/>
             <a:rect l="l" t="t" r="r" b="b"/>
             <a:pathLst>
-              <a:path w="10000" h="44000">
+              <a:path w="12000" h="44000">
                 <a:moveTo>
-                  <a:pt x="5900" y="0"/>
+                  <a:pt x="7250" y="0"/>
                 </a:moveTo>
                 <a:lnTo>
-                  <a:pt x="5900" y="32000"/>
+                  <a:pt x="7250" y="29000"/>
                 </a:lnTo>
                 <a:lnTo>
-                  <a:pt x="10000" y="32000"/>
+                  <a:pt x="12000" y="29000"/>
                 </a:lnTo>
                 <a:lnTo>
-                  <a:pt x="5000" y="44000"/>
+                  <a:pt x="6000" y="44000"/>
                 </a:lnTo>
                 <a:lnTo>
-                  <a:pt x="0" y="32000"/>
+                  <a:pt x="0" y="29000"/>
                 </a:lnTo>
                 <a:lnTo>
-                  <a:pt x="4100" y="32000"/>
+                  <a:pt x="4750" y="29000"/>
                 </a:lnTo>
                 <a:lnTo>
-                  <a:pt x="4100" y="0"/>
+                  <a:pt x="4750" y="0"/>
                 </a:lnTo>
                 <a:close/>
               </a:path>
             </a:pathLst>
           </a:custGeom>
           <a:solidFill>
-            <a:srgbClr val="4B5563"/>
+            <a:srgbClr val="3C4753"/>
           </a:solidFill>
           <a:ln>
             <a:noFill/>
@@ -12852,7 +12852,7 @@
           <a:solidFill>
             <a:srgbClr val="FFFFFF"/>
           </a:solidFill>
-          <a:ln w="8731">
+          <a:ln w="12699">
             <a:solidFill>
               <a:srgbClr val="CBD3DA"/>
             </a:solidFill>
@@ -12914,9 +12914,9 @@
               <a:spcAft>
                 <a:spcPts val="0"/>
               </a:spcAft>
-              <a:defRPr sz="999" b="0" i="0" lang="zh-CN" dirty="0">
+              <a:defRPr sz="999" b="1" i="0" lang="zh-CN" dirty="0">
                 <a:solidFill>
-                  <a:srgbClr val="3F4854"/>
+                  <a:srgbClr val="27303A"/>
                 </a:solidFill>
                 <a:latin typeface="DejaVu Sans"/>
                 <a:ea typeface="DejaVu Sans"/>
@@ -12924,9 +12924,9 @@
               </a:defRPr>
             </a:pPr>
             <a:r>
-              <a:rPr sz="999" b="0" i="0" lang="zh-CN" dirty="0">
+              <a:rPr sz="999" b="1" i="0" lang="zh-CN" dirty="0">
                 <a:solidFill>
-                  <a:srgbClr val="3F4854"/>
+                  <a:srgbClr val="27303A"/>
                 </a:solidFill>
                 <a:latin typeface="DejaVu Sans"/>
                 <a:ea typeface="DejaVu Sans"/>
@@ -12945,8 +12945,8 @@
         </p:nvSpPr>
         <p:spPr>
           <a:xfrm>
-            <a:off x="8318500" y="3206750"/>
-            <a:ext cx="79375" cy="349250"/>
+            <a:off x="8310562" y="3206750"/>
+            <a:ext cx="95250" cy="349250"/>
           </a:xfrm>
           <a:custGeom>
             <a:avLst/>
@@ -12955,34 +12955,34 @@
             <a:cxnLst/>
             <a:rect l="l" t="t" r="r" b="b"/>
             <a:pathLst>
-              <a:path w="10000" h="44000">
+              <a:path w="12000" h="44000">
                 <a:moveTo>
-                  <a:pt x="5900" y="0"/>
+                  <a:pt x="7250" y="0"/>
                 </a:moveTo>
                 <a:lnTo>
-                  <a:pt x="5900" y="32000"/>
+                  <a:pt x="7250" y="29000"/>
                 </a:lnTo>
                 <a:lnTo>
-                  <a:pt x="10000" y="32000"/>
+                  <a:pt x="12000" y="29000"/>
                 </a:lnTo>
                 <a:lnTo>
-                  <a:pt x="5000" y="44000"/>
+                  <a:pt x="6000" y="44000"/>
                 </a:lnTo>
                 <a:lnTo>
-                  <a:pt x="0" y="32000"/>
+                  <a:pt x="0" y="29000"/>
                 </a:lnTo>
                 <a:lnTo>
-                  <a:pt x="4100" y="32000"/>
+                  <a:pt x="4750" y="29000"/>
                 </a:lnTo>
                 <a:lnTo>
-                  <a:pt x="4100" y="0"/>
+                  <a:pt x="4750" y="0"/>
                 </a:lnTo>
                 <a:close/>
               </a:path>
             </a:pathLst>
           </a:custGeom>
           <a:solidFill>
-            <a:srgbClr val="4B5563"/>
+            <a:srgbClr val="3C4753"/>
           </a:solidFill>
           <a:ln>
             <a:noFill/>
@@ -13019,7 +13019,7 @@
         </p:nvSpPr>
         <p:spPr>
           <a:xfrm>
-            <a:off x="8493124" y="3222624"/>
+            <a:off x="8342312" y="3222624"/>
             <a:ext cx="2008187" cy="309562"/>
           </a:xfrm>
           <a:prstGeom prst="roundRect">
@@ -13030,7 +13030,7 @@
           <a:solidFill>
             <a:srgbClr val="FFFFFF"/>
           </a:solidFill>
-          <a:ln w="8731">
+          <a:ln w="12699">
             <a:solidFill>
               <a:srgbClr val="CBD3DA"/>
             </a:solidFill>
@@ -13067,7 +13067,7 @@
         </p:nvSpPr>
         <p:spPr>
           <a:xfrm>
-            <a:off x="8572499" y="3254374"/>
+            <a:off x="8421687" y="3254374"/>
             <a:ext cx="1849437" cy="246062"/>
           </a:xfrm>
           <a:prstGeom prst="rect">
@@ -13092,9 +13092,9 @@
               <a:spcAft>
                 <a:spcPts val="0"/>
               </a:spcAft>
-              <a:defRPr sz="999" b="0" i="0" lang="zh-CN" dirty="0">
+              <a:defRPr sz="999" b="1" i="0" lang="zh-CN" dirty="0">
                 <a:solidFill>
-                  <a:srgbClr val="3F4854"/>
+                  <a:srgbClr val="27303A"/>
                 </a:solidFill>
                 <a:latin typeface="DejaVu Sans"/>
                 <a:ea typeface="DejaVu Sans"/>
@@ -13102,9 +13102,9 @@
               </a:defRPr>
             </a:pPr>
             <a:r>
-              <a:rPr sz="999" b="0" i="0" lang="zh-CN" dirty="0">
+              <a:rPr sz="999" b="1" i="0" lang="zh-CN" dirty="0">
                 <a:solidFill>
-                  <a:srgbClr val="3F4854"/>
+                  <a:srgbClr val="27303A"/>
                 </a:solidFill>
                 <a:latin typeface="DejaVu Sans"/>
                 <a:ea typeface="DejaVu Sans"/>
@@ -13129,12 +13129,12 @@
           <a:prstGeom prst="line">
             <a:avLst/>
           </a:prstGeom>
-          <a:ln w="14287">
+          <a:ln w="19843">
             <a:solidFill>
-              <a:srgbClr val="4B5563"/>
+              <a:srgbClr val="3C4753"/>
             </a:solidFill>
             <a:custDash>
-              <a:ds d="611111" sp="388889"/>
+              <a:ds d="440000" sp="280000"/>
             </a:custDash>
             <a:tailEnd type="triangle"/>
           </a:ln>
@@ -13163,7 +13163,7 @@
         </p:nvSpPr>
         <p:spPr>
           <a:xfrm>
-            <a:off x="9794874" y="3571874"/>
+            <a:off x="10445749" y="3222624"/>
             <a:ext cx="1698624" cy="309562"/>
           </a:xfrm>
           <a:prstGeom prst="roundRect">
@@ -13174,7 +13174,7 @@
           <a:solidFill>
             <a:srgbClr val="FFFFFF"/>
           </a:solidFill>
-          <a:ln w="8731">
+          <a:ln w="12699">
             <a:solidFill>
               <a:srgbClr val="CBD3DA"/>
             </a:solidFill>
@@ -13211,7 +13211,7 @@
         </p:nvSpPr>
         <p:spPr>
           <a:xfrm>
-            <a:off x="9874249" y="3603624"/>
+            <a:off x="10525124" y="3254374"/>
             <a:ext cx="1539874" cy="246062"/>
           </a:xfrm>
           <a:prstGeom prst="rect">
@@ -13236,9 +13236,9 @@
               <a:spcAft>
                 <a:spcPts val="0"/>
               </a:spcAft>
-              <a:defRPr sz="999" b="0" i="0" lang="zh-CN" dirty="0">
+              <a:defRPr sz="999" b="1" i="0" lang="zh-CN" dirty="0">
                 <a:solidFill>
-                  <a:srgbClr val="3F4854"/>
+                  <a:srgbClr val="27303A"/>
                 </a:solidFill>
                 <a:latin typeface="DejaVu Sans"/>
                 <a:ea typeface="DejaVu Sans"/>
@@ -13246,9 +13246,9 @@
               </a:defRPr>
             </a:pPr>
             <a:r>
-              <a:rPr sz="999" b="0" i="0" lang="zh-CN" dirty="0">
+              <a:rPr sz="999" b="1" i="0" lang="zh-CN" dirty="0">
                 <a:solidFill>
-                  <a:srgbClr val="3F4854"/>
+                  <a:srgbClr val="27303A"/>
                 </a:solidFill>
                 <a:latin typeface="DejaVu Sans"/>
                 <a:ea typeface="DejaVu Sans"/>
@@ -13267,8 +13267,8 @@
         </p:nvSpPr>
         <p:spPr>
           <a:xfrm>
-            <a:off x="1746250" y="5572125"/>
-            <a:ext cx="79375" cy="174625"/>
+            <a:off x="1738312" y="5572125"/>
+            <a:ext cx="95250" cy="174625"/>
           </a:xfrm>
           <a:custGeom>
             <a:avLst/>
@@ -13277,34 +13277,34 @@
             <a:cxnLst/>
             <a:rect l="l" t="t" r="r" b="b"/>
             <a:pathLst>
-              <a:path w="10000" h="22000">
+              <a:path w="12000" h="22000">
                 <a:moveTo>
-                  <a:pt x="5900" y="0"/>
+                  <a:pt x="7250" y="0"/>
                 </a:moveTo>
                 <a:lnTo>
-                  <a:pt x="5900" y="10000"/>
+                  <a:pt x="7250" y="7000"/>
                 </a:lnTo>
                 <a:lnTo>
-                  <a:pt x="10000" y="10000"/>
+                  <a:pt x="12000" y="7000"/>
                 </a:lnTo>
                 <a:lnTo>
-                  <a:pt x="5000" y="22000"/>
+                  <a:pt x="6000" y="22000"/>
                 </a:lnTo>
                 <a:lnTo>
-                  <a:pt x="0" y="10000"/>
+                  <a:pt x="0" y="7000"/>
                 </a:lnTo>
                 <a:lnTo>
-                  <a:pt x="4100" y="10000"/>
+                  <a:pt x="4750" y="7000"/>
                 </a:lnTo>
                 <a:lnTo>
-                  <a:pt x="4100" y="0"/>
+                  <a:pt x="4750" y="0"/>
                 </a:lnTo>
                 <a:close/>
               </a:path>
             </a:pathLst>
           </a:custGeom>
           <a:solidFill>
-            <a:srgbClr val="4B5563"/>
+            <a:srgbClr val="3C4753"/>
           </a:solidFill>
           <a:ln>
             <a:noFill/>
@@ -13352,7 +13352,7 @@
           <a:solidFill>
             <a:srgbClr val="FFFFFF"/>
           </a:solidFill>
-          <a:ln w="8731">
+          <a:ln w="12699">
             <a:solidFill>
               <a:srgbClr val="CBD3DA"/>
             </a:solidFill>
@@ -13414,9 +13414,9 @@
               <a:spcAft>
                 <a:spcPts val="0"/>
               </a:spcAft>
-              <a:defRPr sz="999" b="0" i="0" lang="zh-CN" dirty="0">
+              <a:defRPr sz="999" b="1" i="0" lang="zh-CN" dirty="0">
                 <a:solidFill>
-                  <a:srgbClr val="3F4854"/>
+                  <a:srgbClr val="27303A"/>
                 </a:solidFill>
                 <a:latin typeface="DejaVu Sans"/>
                 <a:ea typeface="DejaVu Sans"/>
@@ -13424,9 +13424,9 @@
               </a:defRPr>
             </a:pPr>
             <a:r>
-              <a:rPr sz="999" b="0" i="0" lang="zh-CN" dirty="0">
+              <a:rPr sz="999" b="1" i="0" lang="zh-CN" dirty="0">
                 <a:solidFill>
-                  <a:srgbClr val="3F4854"/>
+                  <a:srgbClr val="27303A"/>
                 </a:solidFill>
                 <a:latin typeface="DejaVu Sans"/>
                 <a:ea typeface="DejaVu Sans"/>
@@ -13445,8 +13445,8 @@
         </p:nvSpPr>
         <p:spPr>
           <a:xfrm>
-            <a:off x="4619625" y="5572125"/>
-            <a:ext cx="79375" cy="174625"/>
+            <a:off x="4611687" y="5572125"/>
+            <a:ext cx="95250" cy="174625"/>
           </a:xfrm>
           <a:custGeom>
             <a:avLst/>
@@ -13455,34 +13455,34 @@
             <a:cxnLst/>
             <a:rect l="l" t="t" r="r" b="b"/>
             <a:pathLst>
-              <a:path w="10000" h="22000">
+              <a:path w="12000" h="22000">
                 <a:moveTo>
-                  <a:pt x="5900" y="0"/>
+                  <a:pt x="7250" y="0"/>
                 </a:moveTo>
                 <a:lnTo>
-                  <a:pt x="5900" y="10000"/>
+                  <a:pt x="7250" y="7000"/>
                 </a:lnTo>
                 <a:lnTo>
-                  <a:pt x="10000" y="10000"/>
+                  <a:pt x="12000" y="7000"/>
                 </a:lnTo>
                 <a:lnTo>
-                  <a:pt x="5000" y="22000"/>
+                  <a:pt x="6000" y="22000"/>
                 </a:lnTo>
                 <a:lnTo>
-                  <a:pt x="0" y="10000"/>
+                  <a:pt x="0" y="7000"/>
                 </a:lnTo>
                 <a:lnTo>
-                  <a:pt x="4100" y="10000"/>
+                  <a:pt x="4750" y="7000"/>
                 </a:lnTo>
                 <a:lnTo>
-                  <a:pt x="4100" y="0"/>
+                  <a:pt x="4750" y="0"/>
                 </a:lnTo>
                 <a:close/>
               </a:path>
             </a:pathLst>
           </a:custGeom>
           <a:solidFill>
-            <a:srgbClr val="4B5563"/>
+            <a:srgbClr val="3C4753"/>
           </a:solidFill>
           <a:ln>
             <a:noFill/>
@@ -13530,7 +13530,7 @@
           <a:solidFill>
             <a:srgbClr val="FFFFFF"/>
           </a:solidFill>
-          <a:ln w="8731">
+          <a:ln w="12699">
             <a:solidFill>
               <a:srgbClr val="CBD3DA"/>
             </a:solidFill>
@@ -13592,9 +13592,9 @@
               <a:spcAft>
                 <a:spcPts val="0"/>
               </a:spcAft>
-              <a:defRPr sz="999" b="0" i="0" lang="zh-CN" dirty="0">
+              <a:defRPr sz="999" b="1" i="0" lang="zh-CN" dirty="0">
                 <a:solidFill>
-                  <a:srgbClr val="3F4854"/>
+                  <a:srgbClr val="27303A"/>
                 </a:solidFill>
                 <a:latin typeface="DejaVu Sans"/>
                 <a:ea typeface="DejaVu Sans"/>
@@ -13602,9 +13602,9 @@
               </a:defRPr>
             </a:pPr>
             <a:r>
-              <a:rPr sz="999" b="0" i="0" lang="zh-CN" dirty="0">
+              <a:rPr sz="999" b="1" i="0" lang="zh-CN" dirty="0">
                 <a:solidFill>
-                  <a:srgbClr val="3F4854"/>
+                  <a:srgbClr val="27303A"/>
                 </a:solidFill>
                 <a:latin typeface="DejaVu Sans"/>
                 <a:ea typeface="DejaVu Sans"/>
@@ -13623,8 +13623,8 @@
         </p:nvSpPr>
         <p:spPr>
           <a:xfrm>
-            <a:off x="7493000" y="5572125"/>
-            <a:ext cx="79375" cy="174625"/>
+            <a:off x="7485062" y="5572125"/>
+            <a:ext cx="95250" cy="174625"/>
           </a:xfrm>
           <a:custGeom>
             <a:avLst/>
@@ -13633,34 +13633,34 @@
             <a:cxnLst/>
             <a:rect l="l" t="t" r="r" b="b"/>
             <a:pathLst>
-              <a:path w="10000" h="22000">
+              <a:path w="12000" h="22000">
                 <a:moveTo>
-                  <a:pt x="5900" y="0"/>
+                  <a:pt x="7250" y="0"/>
                 </a:moveTo>
                 <a:lnTo>
-                  <a:pt x="5900" y="10000"/>
+                  <a:pt x="7250" y="7000"/>
                 </a:lnTo>
                 <a:lnTo>
-                  <a:pt x="10000" y="10000"/>
+                  <a:pt x="12000" y="7000"/>
                 </a:lnTo>
                 <a:lnTo>
-                  <a:pt x="5000" y="22000"/>
+                  <a:pt x="6000" y="22000"/>
                 </a:lnTo>
                 <a:lnTo>
-                  <a:pt x="0" y="10000"/>
+                  <a:pt x="0" y="7000"/>
                 </a:lnTo>
                 <a:lnTo>
-                  <a:pt x="4100" y="10000"/>
+                  <a:pt x="4750" y="7000"/>
                 </a:lnTo>
                 <a:lnTo>
-                  <a:pt x="4100" y="0"/>
+                  <a:pt x="4750" y="0"/>
                 </a:lnTo>
                 <a:close/>
               </a:path>
             </a:pathLst>
           </a:custGeom>
           <a:solidFill>
-            <a:srgbClr val="4B5563"/>
+            <a:srgbClr val="3C4753"/>
           </a:solidFill>
           <a:ln>
             <a:noFill/>
@@ -13708,7 +13708,7 @@
           <a:solidFill>
             <a:srgbClr val="FFFFFF"/>
           </a:solidFill>
-          <a:ln w="8731">
+          <a:ln w="12699">
             <a:solidFill>
               <a:srgbClr val="CBD3DA"/>
             </a:solidFill>
@@ -13770,9 +13770,9 @@
               <a:spcAft>
                 <a:spcPts val="0"/>
               </a:spcAft>
-              <a:defRPr sz="999" b="0" i="0" lang="zh-CN" dirty="0">
+              <a:defRPr sz="999" b="1" i="0" lang="zh-CN" dirty="0">
                 <a:solidFill>
-                  <a:srgbClr val="3F4854"/>
+                  <a:srgbClr val="27303A"/>
                 </a:solidFill>
                 <a:latin typeface="DejaVu Sans"/>
                 <a:ea typeface="DejaVu Sans"/>
@@ -13780,9 +13780,9 @@
               </a:defRPr>
             </a:pPr>
             <a:r>
-              <a:rPr sz="999" b="0" i="0" lang="zh-CN" dirty="0">
+              <a:rPr sz="999" b="1" i="0" lang="zh-CN" dirty="0">
                 <a:solidFill>
-                  <a:srgbClr val="3F4854"/>
+                  <a:srgbClr val="27303A"/>
                 </a:solidFill>
                 <a:latin typeface="DejaVu Sans"/>
                 <a:ea typeface="DejaVu Sans"/>
@@ -13801,8 +13801,8 @@
         </p:nvSpPr>
         <p:spPr>
           <a:xfrm>
-            <a:off x="10366375" y="5572125"/>
-            <a:ext cx="79375" cy="174625"/>
+            <a:off x="10358437" y="5572125"/>
+            <a:ext cx="95250" cy="174625"/>
           </a:xfrm>
           <a:custGeom>
             <a:avLst/>
@@ -13811,34 +13811,34 @@
             <a:cxnLst/>
             <a:rect l="l" t="t" r="r" b="b"/>
             <a:pathLst>
-              <a:path w="10000" h="22000">
+              <a:path w="12000" h="22000">
                 <a:moveTo>
-                  <a:pt x="5900" y="0"/>
+                  <a:pt x="7250" y="0"/>
                 </a:moveTo>
                 <a:lnTo>
-                  <a:pt x="5900" y="10000"/>
+                  <a:pt x="7250" y="7000"/>
                 </a:lnTo>
                 <a:lnTo>
-                  <a:pt x="10000" y="10000"/>
+                  <a:pt x="12000" y="7000"/>
                 </a:lnTo>
                 <a:lnTo>
-                  <a:pt x="5000" y="22000"/>
+                  <a:pt x="6000" y="22000"/>
                 </a:lnTo>
                 <a:lnTo>
-                  <a:pt x="0" y="10000"/>
+                  <a:pt x="0" y="7000"/>
                 </a:lnTo>
                 <a:lnTo>
-                  <a:pt x="4100" y="10000"/>
+                  <a:pt x="4750" y="7000"/>
                 </a:lnTo>
                 <a:lnTo>
-                  <a:pt x="4100" y="0"/>
+                  <a:pt x="4750" y="0"/>
                 </a:lnTo>
                 <a:close/>
               </a:path>
             </a:pathLst>
           </a:custGeom>
           <a:solidFill>
-            <a:srgbClr val="4B5563"/>
+            <a:srgbClr val="3C4753"/>
           </a:solidFill>
           <a:ln>
             <a:noFill/>
@@ -13875,7 +13875,7 @@
         </p:nvSpPr>
         <p:spPr>
           <a:xfrm>
-            <a:off x="9651999" y="5778499"/>
+            <a:off x="9651999" y="5508624"/>
             <a:ext cx="1500187" cy="309562"/>
           </a:xfrm>
           <a:prstGeom prst="roundRect">
@@ -13886,7 +13886,7 @@
           <a:solidFill>
             <a:srgbClr val="FFFFFF"/>
           </a:solidFill>
-          <a:ln w="8731">
+          <a:ln w="12699">
             <a:solidFill>
               <a:srgbClr val="CBD3DA"/>
             </a:solidFill>
@@ -13923,7 +13923,7 @@
         </p:nvSpPr>
         <p:spPr>
           <a:xfrm>
-            <a:off x="9731374" y="5810249"/>
+            <a:off x="9731374" y="5540374"/>
             <a:ext cx="1341437" cy="246062"/>
           </a:xfrm>
           <a:prstGeom prst="rect">
@@ -13948,9 +13948,9 @@
               <a:spcAft>
                 <a:spcPts val="0"/>
               </a:spcAft>
-              <a:defRPr sz="999" b="0" i="0" lang="zh-CN" dirty="0">
+              <a:defRPr sz="999" b="1" i="0" lang="zh-CN" dirty="0">
                 <a:solidFill>
-                  <a:srgbClr val="3F4854"/>
+                  <a:srgbClr val="27303A"/>
                 </a:solidFill>
                 <a:latin typeface="DejaVu Sans"/>
                 <a:ea typeface="DejaVu Sans"/>
@@ -13958,9 +13958,9 @@
               </a:defRPr>
             </a:pPr>
             <a:r>
-              <a:rPr sz="999" b="0" i="0" lang="zh-CN" dirty="0">
+              <a:rPr sz="999" b="1" i="0" lang="zh-CN" dirty="0">
                 <a:solidFill>
-                  <a:srgbClr val="3F4854"/>
+                  <a:srgbClr val="27303A"/>
                 </a:solidFill>
                 <a:latin typeface="DejaVu Sans"/>
                 <a:ea typeface="DejaVu Sans"/>
